--- a/Диплом/Презентация/Бородина_Анастасия_Владимировна_2207Д2_06.05.26.pptx
+++ b/Диплом/Презентация/Бородина_Анастасия_Владимировна_2207Д2_06.05.26.pptx
@@ -5,7 +5,7 @@
     <p:sldMasterId id="2147483648" r:id="rId1"/>
   </p:sldMasterIdLst>
   <p:notesMasterIdLst>
-    <p:notesMasterId r:id="rId17"/>
+    <p:notesMasterId r:id="rId18"/>
   </p:notesMasterIdLst>
   <p:sldIdLst>
     <p:sldId id="257" r:id="rId2"/>
@@ -15,14 +15,15 @@
     <p:sldId id="262" r:id="rId6"/>
     <p:sldId id="265" r:id="rId7"/>
     <p:sldId id="264" r:id="rId8"/>
-    <p:sldId id="269" r:id="rId9"/>
-    <p:sldId id="266" r:id="rId10"/>
-    <p:sldId id="271" r:id="rId11"/>
-    <p:sldId id="263" r:id="rId12"/>
-    <p:sldId id="270" r:id="rId13"/>
-    <p:sldId id="267" r:id="rId14"/>
-    <p:sldId id="268" r:id="rId15"/>
-    <p:sldId id="259" r:id="rId16"/>
+    <p:sldId id="272" r:id="rId9"/>
+    <p:sldId id="269" r:id="rId10"/>
+    <p:sldId id="266" r:id="rId11"/>
+    <p:sldId id="271" r:id="rId12"/>
+    <p:sldId id="263" r:id="rId13"/>
+    <p:sldId id="270" r:id="rId14"/>
+    <p:sldId id="267" r:id="rId15"/>
+    <p:sldId id="268" r:id="rId16"/>
+    <p:sldId id="259" r:id="rId17"/>
   </p:sldIdLst>
   <p:sldSz cx="12192000" cy="6858000"/>
   <p:notesSz cx="6858000" cy="9144000"/>
@@ -223,7 +224,7 @@
             <a:fld id="{2CBAF322-1614-4B94-B6A1-B76658E349DC}" type="datetimeFigureOut">
               <a:rPr lang="ru-RU" smtClean="0"/>
               <a:pPr/>
-              <a:t>06.05.2026</a:t>
+              <a:t>08.05.2026</a:t>
             </a:fld>
             <a:endParaRPr lang="ru-RU"/>
           </a:p>
@@ -638,7 +639,7 @@
           <a:p>
             <a:fld id="{929F2640-2EF4-4A43-9842-276C25197E25}" type="datetime1">
               <a:rPr lang="ru-RU" smtClean="0"/>
-              <a:t>06.05.2026</a:t>
+              <a:t>08.05.2026</a:t>
             </a:fld>
             <a:endParaRPr lang="ru-RU"/>
           </a:p>
@@ -837,7 +838,7 @@
           <a:p>
             <a:fld id="{FA7AEEE2-DC8F-4C66-9038-4CB95A7529D0}" type="datetime1">
               <a:rPr lang="ru-RU" smtClean="0"/>
-              <a:t>06.05.2026</a:t>
+              <a:t>08.05.2026</a:t>
             </a:fld>
             <a:endParaRPr lang="ru-RU"/>
           </a:p>
@@ -1046,7 +1047,7 @@
           <a:p>
             <a:fld id="{E86C36E5-C478-443C-BAEF-26B63FBE0A6B}" type="datetime1">
               <a:rPr lang="ru-RU" smtClean="0"/>
-              <a:t>06.05.2026</a:t>
+              <a:t>08.05.2026</a:t>
             </a:fld>
             <a:endParaRPr lang="ru-RU"/>
           </a:p>
@@ -1245,7 +1246,7 @@
           <a:p>
             <a:fld id="{1D830A2B-E972-4650-9194-9F682251A062}" type="datetime1">
               <a:rPr lang="ru-RU" smtClean="0"/>
-              <a:t>06.05.2026</a:t>
+              <a:t>08.05.2026</a:t>
             </a:fld>
             <a:endParaRPr lang="ru-RU"/>
           </a:p>
@@ -1521,7 +1522,7 @@
           <a:p>
             <a:fld id="{73089D3F-9628-40A0-8CDF-BFC5BF8A512E}" type="datetime1">
               <a:rPr lang="ru-RU" smtClean="0"/>
-              <a:t>06.05.2026</a:t>
+              <a:t>08.05.2026</a:t>
             </a:fld>
             <a:endParaRPr lang="ru-RU"/>
           </a:p>
@@ -1787,7 +1788,7 @@
           <a:p>
             <a:fld id="{994FC618-F43D-4137-885A-9D660F20BABE}" type="datetime1">
               <a:rPr lang="ru-RU" smtClean="0"/>
-              <a:t>06.05.2026</a:t>
+              <a:t>08.05.2026</a:t>
             </a:fld>
             <a:endParaRPr lang="ru-RU"/>
           </a:p>
@@ -2200,7 +2201,7 @@
           <a:p>
             <a:fld id="{68F59E0F-81D3-46F2-A21F-80B324275C0B}" type="datetime1">
               <a:rPr lang="ru-RU" smtClean="0"/>
-              <a:t>06.05.2026</a:t>
+              <a:t>08.05.2026</a:t>
             </a:fld>
             <a:endParaRPr lang="ru-RU"/>
           </a:p>
@@ -2342,7 +2343,7 @@
           <a:p>
             <a:fld id="{CBDF851B-9994-4471-A95F-63C98C94C25C}" type="datetime1">
               <a:rPr lang="ru-RU" smtClean="0"/>
-              <a:t>06.05.2026</a:t>
+              <a:t>08.05.2026</a:t>
             </a:fld>
             <a:endParaRPr lang="ru-RU"/>
           </a:p>
@@ -2456,7 +2457,7 @@
           <a:p>
             <a:fld id="{FE9C0E54-4CC8-47B6-A2ED-519E308C3D5C}" type="datetime1">
               <a:rPr lang="ru-RU" smtClean="0"/>
-              <a:t>06.05.2026</a:t>
+              <a:t>08.05.2026</a:t>
             </a:fld>
             <a:endParaRPr lang="ru-RU"/>
           </a:p>
@@ -2768,7 +2769,7 @@
           <a:p>
             <a:fld id="{B148578A-6CC4-494D-9939-AE0BC863DCC9}" type="datetime1">
               <a:rPr lang="ru-RU" smtClean="0"/>
-              <a:t>06.05.2026</a:t>
+              <a:t>08.05.2026</a:t>
             </a:fld>
             <a:endParaRPr lang="ru-RU"/>
           </a:p>
@@ -3057,7 +3058,7 @@
           <a:p>
             <a:fld id="{0D930757-F38F-41AC-A030-FD2A4ED4502C}" type="datetime1">
               <a:rPr lang="ru-RU" smtClean="0"/>
-              <a:t>06.05.2026</a:t>
+              <a:t>08.05.2026</a:t>
             </a:fld>
             <a:endParaRPr lang="ru-RU"/>
           </a:p>
@@ -3299,7 +3300,7 @@
           <a:p>
             <a:fld id="{FDEF9CD6-0EBB-4035-B231-EA9AEF8C103A}" type="datetime1">
               <a:rPr lang="ru-RU" smtClean="0"/>
-              <a:t>06.05.2026</a:t>
+              <a:t>08.05.2026</a:t>
             </a:fld>
             <a:endParaRPr lang="ru-RU"/>
           </a:p>
@@ -4142,6 +4143,223 @@
         <p:cNvPr id="1" name="">
           <a:extLst>
             <a:ext uri="{FF2B5EF4-FFF2-40B4-BE49-F238E27FC236}">
+              <a16:creationId xmlns:a16="http://schemas.microsoft.com/office/drawing/2014/main" id="{2CF80C0C-3D0B-4798-D0F8-D8BC6E18188C}"/>
+            </a:ext>
+          </a:extLst>
+        </p:cNvPr>
+        <p:cNvGrpSpPr/>
+        <p:nvPr/>
+      </p:nvGrpSpPr>
+      <p:grpSpPr>
+        <a:xfrm>
+          <a:off x="0" y="0"/>
+          <a:ext cx="0" cy="0"/>
+          <a:chOff x="0" y="0"/>
+          <a:chExt cx="0" cy="0"/>
+        </a:xfrm>
+      </p:grpSpPr>
+      <p:pic>
+        <p:nvPicPr>
+          <p:cNvPr id="4100" name="Picture 4">
+            <a:extLst>
+              <a:ext uri="{FF2B5EF4-FFF2-40B4-BE49-F238E27FC236}">
+                <a16:creationId xmlns:a16="http://schemas.microsoft.com/office/drawing/2014/main" id="{A5D6C6DE-E43A-F39F-75D2-1104F71AFED0}"/>
+              </a:ext>
+            </a:extLst>
+          </p:cNvPr>
+          <p:cNvPicPr>
+            <a:picLocks noChangeAspect="1" noChangeArrowheads="1"/>
+          </p:cNvPicPr>
+          <p:nvPr/>
+        </p:nvPicPr>
+        <p:blipFill>
+          <a:blip r:embed="rId2">
+            <a:extLst>
+              <a:ext uri="{28A0092B-C50C-407E-A947-70E740481C1C}">
+                <a14:useLocalDpi xmlns:a14="http://schemas.microsoft.com/office/drawing/2010/main" val="0"/>
+              </a:ext>
+            </a:extLst>
+          </a:blip>
+          <a:srcRect/>
+          <a:stretch>
+            <a:fillRect/>
+          </a:stretch>
+        </p:blipFill>
+        <p:spPr bwMode="auto">
+          <a:xfrm>
+            <a:off x="838200" y="1314335"/>
+            <a:ext cx="9920098" cy="4541545"/>
+          </a:xfrm>
+          <a:prstGeom prst="rect">
+            <a:avLst/>
+          </a:prstGeom>
+          <a:noFill/>
+          <a:extLst>
+            <a:ext uri="{909E8E84-426E-40DD-AFC4-6F175D3DCCD1}">
+              <a14:hiddenFill xmlns:a14="http://schemas.microsoft.com/office/drawing/2010/main">
+                <a:solidFill>
+                  <a:srgbClr val="FFFFFF"/>
+                </a:solidFill>
+              </a14:hiddenFill>
+            </a:ext>
+          </a:extLst>
+        </p:spPr>
+      </p:pic>
+      <p:sp>
+        <p:nvSpPr>
+          <p:cNvPr id="2" name="Заголовок 1">
+            <a:extLst>
+              <a:ext uri="{FF2B5EF4-FFF2-40B4-BE49-F238E27FC236}">
+                <a16:creationId xmlns:a16="http://schemas.microsoft.com/office/drawing/2014/main" id="{AF753F7E-A2DB-E46D-1FCB-FCA6AF55694C}"/>
+              </a:ext>
+            </a:extLst>
+          </p:cNvPr>
+          <p:cNvSpPr>
+            <a:spLocks noGrp="1"/>
+          </p:cNvSpPr>
+          <p:nvPr>
+            <p:ph type="title"/>
+          </p:nvPr>
+        </p:nvSpPr>
+        <p:spPr>
+          <a:xfrm>
+            <a:off x="838200" y="0"/>
+            <a:ext cx="10515600" cy="1325563"/>
+          </a:xfrm>
+        </p:spPr>
+        <p:txBody>
+          <a:bodyPr/>
+          <a:lstStyle/>
+          <a:p>
+            <a:r>
+              <a:rPr lang="ru-RU" b="1" dirty="0">
+                <a:latin typeface="+mn-lt"/>
+              </a:rPr>
+              <a:t>Интерфейс продукта</a:t>
+            </a:r>
+          </a:p>
+        </p:txBody>
+      </p:sp>
+      <p:sp>
+        <p:nvSpPr>
+          <p:cNvPr id="3" name="Номер слайда 2">
+            <a:extLst>
+              <a:ext uri="{FF2B5EF4-FFF2-40B4-BE49-F238E27FC236}">
+                <a16:creationId xmlns:a16="http://schemas.microsoft.com/office/drawing/2014/main" id="{2660AD78-9BD8-56CD-7F5C-A3277723456C}"/>
+              </a:ext>
+            </a:extLst>
+          </p:cNvPr>
+          <p:cNvSpPr>
+            <a:spLocks noGrp="1"/>
+          </p:cNvSpPr>
+          <p:nvPr>
+            <p:ph type="sldNum" sz="quarter" idx="12"/>
+          </p:nvPr>
+        </p:nvSpPr>
+        <p:spPr/>
+        <p:txBody>
+          <a:bodyPr/>
+          <a:lstStyle/>
+          <a:p>
+            <a:fld id="{C792C54E-EFF1-4B00-8652-01128ACE980F}" type="slidenum">
+              <a:rPr lang="ru-RU" smtClean="0"/>
+              <a:pPr/>
+              <a:t>10</a:t>
+            </a:fld>
+            <a:endParaRPr lang="ru-RU"/>
+          </a:p>
+        </p:txBody>
+      </p:sp>
+      <p:sp>
+        <p:nvSpPr>
+          <p:cNvPr id="4" name="Объект 6">
+            <a:extLst>
+              <a:ext uri="{FF2B5EF4-FFF2-40B4-BE49-F238E27FC236}">
+                <a16:creationId xmlns:a16="http://schemas.microsoft.com/office/drawing/2014/main" id="{90E6089E-48E2-B130-19F5-4D73C148931F}"/>
+              </a:ext>
+            </a:extLst>
+          </p:cNvPr>
+          <p:cNvSpPr>
+            <a:spLocks noGrp="1"/>
+          </p:cNvSpPr>
+          <p:nvPr>
+            <p:ph idx="1"/>
+          </p:nvPr>
+        </p:nvSpPr>
+        <p:spPr>
+          <a:xfrm>
+            <a:off x="3846022" y="5892166"/>
+            <a:ext cx="4764578" cy="391402"/>
+          </a:xfrm>
+        </p:spPr>
+        <p:txBody>
+          <a:bodyPr>
+            <a:normAutofit lnSpcReduction="10000"/>
+          </a:bodyPr>
+          <a:lstStyle/>
+          <a:p>
+            <a:pPr marL="0" indent="0">
+              <a:buNone/>
+            </a:pPr>
+            <a:r>
+              <a:rPr lang="ru-RU" sz="2400" dirty="0">
+                <a:cs typeface="Times New Roman" panose="02020603050405020304" pitchFamily="18" charset="0"/>
+              </a:rPr>
+              <a:t>Страница </a:t>
+            </a:r>
+            <a:r>
+              <a:rPr lang="en-US" sz="2400" dirty="0">
+                <a:cs typeface="Times New Roman" panose="02020603050405020304" pitchFamily="18" charset="0"/>
+              </a:rPr>
+              <a:t>“</a:t>
+            </a:r>
+            <a:r>
+              <a:rPr lang="ru-RU" sz="2400" dirty="0">
+                <a:cs typeface="Times New Roman" panose="02020603050405020304" pitchFamily="18" charset="0"/>
+              </a:rPr>
+              <a:t>Управление образами</a:t>
+            </a:r>
+            <a:r>
+              <a:rPr lang="en-US" sz="2400" dirty="0">
+                <a:cs typeface="Times New Roman" panose="02020603050405020304" pitchFamily="18" charset="0"/>
+              </a:rPr>
+              <a:t>”</a:t>
+            </a:r>
+            <a:endParaRPr lang="ru-RU" sz="2400" dirty="0">
+              <a:cs typeface="Times New Roman" panose="02020603050405020304" pitchFamily="18" charset="0"/>
+            </a:endParaRPr>
+          </a:p>
+          <a:p>
+            <a:pPr marL="0" indent="0">
+              <a:buNone/>
+            </a:pPr>
+            <a:endParaRPr lang="ru-RU" sz="2400" dirty="0">
+              <a:cs typeface="Times New Roman" panose="02020603050405020304" pitchFamily="18" charset="0"/>
+            </a:endParaRPr>
+          </a:p>
+        </p:txBody>
+      </p:sp>
+    </p:spTree>
+    <p:extLst>
+      <p:ext uri="{BB962C8B-B14F-4D97-AF65-F5344CB8AC3E}">
+        <p14:creationId xmlns:p14="http://schemas.microsoft.com/office/powerpoint/2010/main" val="3313401522"/>
+      </p:ext>
+    </p:extLst>
+  </p:cSld>
+  <p:clrMapOvr>
+    <a:masterClrMapping/>
+  </p:clrMapOvr>
+</p:sld>
+</file>
+
+<file path=ppt/slides/slide11.xml><?xml version="1.0" encoding="utf-8"?>
+<p:sld xmlns:a="http://schemas.openxmlformats.org/drawingml/2006/main" xmlns:r="http://schemas.openxmlformats.org/officeDocument/2006/relationships" xmlns:p="http://schemas.openxmlformats.org/presentationml/2006/main">
+  <p:cSld>
+    <p:spTree>
+      <p:nvGrpSpPr>
+        <p:cNvPr id="1" name="">
+          <a:extLst>
+            <a:ext uri="{FF2B5EF4-FFF2-40B4-BE49-F238E27FC236}">
               <a16:creationId xmlns:a16="http://schemas.microsoft.com/office/drawing/2014/main" id="{CE8DCC2E-C094-6225-8A4C-3843085BF5DA}"/>
             </a:ext>
           </a:extLst>
@@ -4263,7 +4481,7 @@
             <a:fld id="{C792C54E-EFF1-4B00-8652-01128ACE980F}" type="slidenum">
               <a:rPr lang="ru-RU" smtClean="0"/>
               <a:pPr/>
-              <a:t>10</a:t>
+              <a:t>11</a:t>
             </a:fld>
             <a:endParaRPr lang="ru-RU"/>
           </a:p>
@@ -4354,7 +4572,7 @@
 </p:sld>
 </file>
 
-<file path=ppt/slides/slide11.xml><?xml version="1.0" encoding="utf-8"?>
+<file path=ppt/slides/slide12.xml><?xml version="1.0" encoding="utf-8"?>
 <p:sld xmlns:a="http://schemas.openxmlformats.org/drawingml/2006/main" xmlns:r="http://schemas.openxmlformats.org/officeDocument/2006/relationships" xmlns:p="http://schemas.openxmlformats.org/presentationml/2006/main">
   <p:cSld>
     <p:spTree>
@@ -4424,7 +4642,7 @@
             <a:fld id="{C792C54E-EFF1-4B00-8652-01128ACE980F}" type="slidenum">
               <a:rPr lang="ru-RU" smtClean="0"/>
               <a:pPr/>
-              <a:t>11</a:t>
+              <a:t>12</a:t>
             </a:fld>
             <a:endParaRPr lang="ru-RU"/>
           </a:p>
@@ -4554,7 +4772,7 @@
 </p:sld>
 </file>
 
-<file path=ppt/slides/slide12.xml><?xml version="1.0" encoding="utf-8"?>
+<file path=ppt/slides/slide13.xml><?xml version="1.0" encoding="utf-8"?>
 <p:sld xmlns:a="http://schemas.openxmlformats.org/drawingml/2006/main" xmlns:r="http://schemas.openxmlformats.org/officeDocument/2006/relationships" xmlns:p="http://schemas.openxmlformats.org/presentationml/2006/main">
   <p:cSld>
     <p:spTree>
@@ -4683,7 +4901,7 @@
             <a:fld id="{C792C54E-EFF1-4B00-8652-01128ACE980F}" type="slidenum">
               <a:rPr lang="ru-RU" smtClean="0"/>
               <a:pPr/>
-              <a:t>12</a:t>
+              <a:t>13</a:t>
             </a:fld>
             <a:endParaRPr lang="ru-RU"/>
           </a:p>
@@ -4774,7 +4992,7 @@
 </p:sld>
 </file>
 
-<file path=ppt/slides/slide13.xml><?xml version="1.0" encoding="utf-8"?>
+<file path=ppt/slides/slide14.xml><?xml version="1.0" encoding="utf-8"?>
 <p:sld xmlns:a="http://schemas.openxmlformats.org/drawingml/2006/main" xmlns:r="http://schemas.openxmlformats.org/officeDocument/2006/relationships" xmlns:p="http://schemas.openxmlformats.org/presentationml/2006/main">
   <p:cSld>
     <p:spTree>
@@ -4903,7 +5121,7 @@
             <a:fld id="{C792C54E-EFF1-4B00-8652-01128ACE980F}" type="slidenum">
               <a:rPr lang="ru-RU" smtClean="0"/>
               <a:pPr/>
-              <a:t>13</a:t>
+              <a:t>14</a:t>
             </a:fld>
             <a:endParaRPr lang="ru-RU"/>
           </a:p>
@@ -4991,7 +5209,7 @@
 </p:sld>
 </file>
 
-<file path=ppt/slides/slide14.xml><?xml version="1.0" encoding="utf-8"?>
+<file path=ppt/slides/slide15.xml><?xml version="1.0" encoding="utf-8"?>
 <p:sld xmlns:a="http://schemas.openxmlformats.org/drawingml/2006/main" xmlns:r="http://schemas.openxmlformats.org/officeDocument/2006/relationships" xmlns:p="http://schemas.openxmlformats.org/presentationml/2006/main">
   <p:cSld>
     <p:spTree>
@@ -5120,7 +5338,7 @@
             <a:fld id="{C792C54E-EFF1-4B00-8652-01128ACE980F}" type="slidenum">
               <a:rPr lang="ru-RU" smtClean="0"/>
               <a:pPr/>
-              <a:t>14</a:t>
+              <a:t>15</a:t>
             </a:fld>
             <a:endParaRPr lang="ru-RU"/>
           </a:p>
@@ -5208,7 +5426,7 @@
 </p:sld>
 </file>
 
-<file path=ppt/slides/slide15.xml><?xml version="1.0" encoding="utf-8"?>
+<file path=ppt/slides/slide16.xml><?xml version="1.0" encoding="utf-8"?>
 <p:sld xmlns:a="http://schemas.openxmlformats.org/drawingml/2006/main" xmlns:r="http://schemas.openxmlformats.org/officeDocument/2006/relationships" xmlns:p="http://schemas.openxmlformats.org/presentationml/2006/main">
   <p:cSld>
     <p:spTree>
@@ -5458,7 +5676,7 @@
             <a:fld id="{C792C54E-EFF1-4B00-8652-01128ACE980F}" type="slidenum">
               <a:rPr lang="ru-RU" smtClean="0"/>
               <a:pPr/>
-              <a:t>15</a:t>
+              <a:t>16</a:t>
             </a:fld>
             <a:endParaRPr lang="ru-RU"/>
           </a:p>
@@ -5548,13 +5766,13 @@
         </p:nvSpPr>
         <p:spPr>
           <a:xfrm>
-            <a:off x="838200" y="1369325"/>
-            <a:ext cx="10515600" cy="792069"/>
+            <a:off x="838200" y="1186062"/>
+            <a:ext cx="10515600" cy="825236"/>
           </a:xfrm>
         </p:spPr>
         <p:txBody>
           <a:bodyPr>
-            <a:normAutofit lnSpcReduction="10000"/>
+            <a:noAutofit/>
           </a:bodyPr>
           <a:lstStyle/>
           <a:p>
@@ -5562,29 +5780,13 @@
               <a:buNone/>
             </a:pPr>
             <a:r>
-              <a:rPr lang="ru-RU" dirty="0">
-                <a:cs typeface="Times New Roman" panose="02020603050405020304" pitchFamily="18" charset="0"/>
-              </a:rPr>
-              <a:t>Разработано по заказу компании ООО «БАЙТ» («Автотрейд»</a:t>
-            </a:r>
-            <a:r>
-              <a:rPr lang="en-US" dirty="0">
-                <a:cs typeface="Times New Roman" panose="02020603050405020304" pitchFamily="18" charset="0"/>
-              </a:rPr>
-              <a:t>) </a:t>
-            </a:r>
-            <a:r>
-              <a:rPr lang="ru-RU" dirty="0">
-                <a:cs typeface="Times New Roman" panose="02020603050405020304" pitchFamily="18" charset="0"/>
-              </a:rPr>
-              <a:t>для внутреннего использования.</a:t>
-            </a:r>
-          </a:p>
-          <a:p>
-            <a:pPr marL="0" indent="0">
-              <a:buNone/>
-            </a:pPr>
-            <a:endParaRPr lang="ru-RU" dirty="0">
+              <a:rPr lang="ru-RU" sz="2400" dirty="0"/>
+              <a:t>Программное средство разработано по заказу компании ООО «БАЙТ» («Автотрейд») для внутреннего использования. </a:t>
+            </a:r>
+            <a:br>
+              <a:rPr lang="ru-RU" sz="2400" dirty="0"/>
+            </a:br>
+            <a:endParaRPr lang="ru-RU" sz="2400" dirty="0">
               <a:cs typeface="Times New Roman" panose="02020603050405020304" pitchFamily="18" charset="0"/>
             </a:endParaRPr>
           </a:p>
@@ -5619,8 +5821,8 @@
         </p:blipFill>
         <p:spPr bwMode="auto">
           <a:xfrm>
-            <a:off x="4075320" y="2968818"/>
-            <a:ext cx="3578494" cy="2892792"/>
+            <a:off x="6463323" y="4219891"/>
+            <a:ext cx="2083911" cy="1684597"/>
           </a:xfrm>
           <a:prstGeom prst="rect">
             <a:avLst/>
@@ -5664,6 +5866,362 @@
               <a:t>2</a:t>
             </a:fld>
             <a:endParaRPr lang="ru-RU" dirty="0"/>
+          </a:p>
+        </p:txBody>
+      </p:sp>
+      <p:sp>
+        <p:nvSpPr>
+          <p:cNvPr id="4" name="Объект 6">
+            <a:extLst>
+              <a:ext uri="{FF2B5EF4-FFF2-40B4-BE49-F238E27FC236}">
+                <a16:creationId xmlns:a16="http://schemas.microsoft.com/office/drawing/2014/main" id="{88BA4AED-33AE-373C-168C-F46908453026}"/>
+              </a:ext>
+            </a:extLst>
+          </p:cNvPr>
+          <p:cNvSpPr txBox="1">
+            <a:spLocks/>
+          </p:cNvSpPr>
+          <p:nvPr/>
+        </p:nvSpPr>
+        <p:spPr>
+          <a:xfrm>
+            <a:off x="838200" y="2011298"/>
+            <a:ext cx="10515600" cy="2381172"/>
+          </a:xfrm>
+          <a:prstGeom prst="rect">
+            <a:avLst/>
+          </a:prstGeom>
+        </p:spPr>
+        <p:txBody>
+          <a:bodyPr vert="horz" lIns="91440" tIns="45720" rIns="91440" bIns="45720" rtlCol="0">
+            <a:noAutofit/>
+          </a:bodyPr>
+          <a:lstStyle>
+            <a:lvl1pPr marL="228600" indent="-228600" algn="l" defTabSz="914400" rtl="0" eaLnBrk="1" latinLnBrk="0" hangingPunct="1">
+              <a:lnSpc>
+                <a:spcPct val="90000"/>
+              </a:lnSpc>
+              <a:spcBef>
+                <a:spcPts val="1000"/>
+              </a:spcBef>
+              <a:buFont typeface="Arial" panose="020B0604020202020204" pitchFamily="34" charset="0"/>
+              <a:buChar char="•"/>
+              <a:defRPr sz="2800" kern="1200">
+                <a:solidFill>
+                  <a:schemeClr val="tx1"/>
+                </a:solidFill>
+                <a:latin typeface="+mn-lt"/>
+                <a:ea typeface="+mn-ea"/>
+                <a:cs typeface="+mn-cs"/>
+              </a:defRPr>
+            </a:lvl1pPr>
+            <a:lvl2pPr marL="685800" indent="-228600" algn="l" defTabSz="914400" rtl="0" eaLnBrk="1" latinLnBrk="0" hangingPunct="1">
+              <a:lnSpc>
+                <a:spcPct val="90000"/>
+              </a:lnSpc>
+              <a:spcBef>
+                <a:spcPts val="500"/>
+              </a:spcBef>
+              <a:buFont typeface="Arial" panose="020B0604020202020204" pitchFamily="34" charset="0"/>
+              <a:buChar char="•"/>
+              <a:defRPr sz="2400" kern="1200">
+                <a:solidFill>
+                  <a:schemeClr val="tx1"/>
+                </a:solidFill>
+                <a:latin typeface="+mn-lt"/>
+                <a:ea typeface="+mn-ea"/>
+                <a:cs typeface="+mn-cs"/>
+              </a:defRPr>
+            </a:lvl2pPr>
+            <a:lvl3pPr marL="1143000" indent="-228600" algn="l" defTabSz="914400" rtl="0" eaLnBrk="1" latinLnBrk="0" hangingPunct="1">
+              <a:lnSpc>
+                <a:spcPct val="90000"/>
+              </a:lnSpc>
+              <a:spcBef>
+                <a:spcPts val="500"/>
+              </a:spcBef>
+              <a:buFont typeface="Arial" panose="020B0604020202020204" pitchFamily="34" charset="0"/>
+              <a:buChar char="•"/>
+              <a:defRPr sz="2000" kern="1200">
+                <a:solidFill>
+                  <a:schemeClr val="tx1"/>
+                </a:solidFill>
+                <a:latin typeface="+mn-lt"/>
+                <a:ea typeface="+mn-ea"/>
+                <a:cs typeface="+mn-cs"/>
+              </a:defRPr>
+            </a:lvl3pPr>
+            <a:lvl4pPr marL="1600200" indent="-228600" algn="l" defTabSz="914400" rtl="0" eaLnBrk="1" latinLnBrk="0" hangingPunct="1">
+              <a:lnSpc>
+                <a:spcPct val="90000"/>
+              </a:lnSpc>
+              <a:spcBef>
+                <a:spcPts val="500"/>
+              </a:spcBef>
+              <a:buFont typeface="Arial" panose="020B0604020202020204" pitchFamily="34" charset="0"/>
+              <a:buChar char="•"/>
+              <a:defRPr sz="1800" kern="1200">
+                <a:solidFill>
+                  <a:schemeClr val="tx1"/>
+                </a:solidFill>
+                <a:latin typeface="+mn-lt"/>
+                <a:ea typeface="+mn-ea"/>
+                <a:cs typeface="+mn-cs"/>
+              </a:defRPr>
+            </a:lvl4pPr>
+            <a:lvl5pPr marL="2057400" indent="-228600" algn="l" defTabSz="914400" rtl="0" eaLnBrk="1" latinLnBrk="0" hangingPunct="1">
+              <a:lnSpc>
+                <a:spcPct val="90000"/>
+              </a:lnSpc>
+              <a:spcBef>
+                <a:spcPts val="500"/>
+              </a:spcBef>
+              <a:buFont typeface="Arial" panose="020B0604020202020204" pitchFamily="34" charset="0"/>
+              <a:buChar char="•"/>
+              <a:defRPr sz="1800" kern="1200">
+                <a:solidFill>
+                  <a:schemeClr val="tx1"/>
+                </a:solidFill>
+                <a:latin typeface="+mn-lt"/>
+                <a:ea typeface="+mn-ea"/>
+                <a:cs typeface="+mn-cs"/>
+              </a:defRPr>
+            </a:lvl5pPr>
+            <a:lvl6pPr marL="2514600" indent="-228600" algn="l" defTabSz="914400" rtl="0" eaLnBrk="1" latinLnBrk="0" hangingPunct="1">
+              <a:lnSpc>
+                <a:spcPct val="90000"/>
+              </a:lnSpc>
+              <a:spcBef>
+                <a:spcPts val="500"/>
+              </a:spcBef>
+              <a:buFont typeface="Arial" panose="020B0604020202020204" pitchFamily="34" charset="0"/>
+              <a:buChar char="•"/>
+              <a:defRPr sz="1800" kern="1200">
+                <a:solidFill>
+                  <a:schemeClr val="tx1"/>
+                </a:solidFill>
+                <a:latin typeface="+mn-lt"/>
+                <a:ea typeface="+mn-ea"/>
+                <a:cs typeface="+mn-cs"/>
+              </a:defRPr>
+            </a:lvl6pPr>
+            <a:lvl7pPr marL="2971800" indent="-228600" algn="l" defTabSz="914400" rtl="0" eaLnBrk="1" latinLnBrk="0" hangingPunct="1">
+              <a:lnSpc>
+                <a:spcPct val="90000"/>
+              </a:lnSpc>
+              <a:spcBef>
+                <a:spcPts val="500"/>
+              </a:spcBef>
+              <a:buFont typeface="Arial" panose="020B0604020202020204" pitchFamily="34" charset="0"/>
+              <a:buChar char="•"/>
+              <a:defRPr sz="1800" kern="1200">
+                <a:solidFill>
+                  <a:schemeClr val="tx1"/>
+                </a:solidFill>
+                <a:latin typeface="+mn-lt"/>
+                <a:ea typeface="+mn-ea"/>
+                <a:cs typeface="+mn-cs"/>
+              </a:defRPr>
+            </a:lvl7pPr>
+            <a:lvl8pPr marL="3429000" indent="-228600" algn="l" defTabSz="914400" rtl="0" eaLnBrk="1" latinLnBrk="0" hangingPunct="1">
+              <a:lnSpc>
+                <a:spcPct val="90000"/>
+              </a:lnSpc>
+              <a:spcBef>
+                <a:spcPts val="500"/>
+              </a:spcBef>
+              <a:buFont typeface="Arial" panose="020B0604020202020204" pitchFamily="34" charset="0"/>
+              <a:buChar char="•"/>
+              <a:defRPr sz="1800" kern="1200">
+                <a:solidFill>
+                  <a:schemeClr val="tx1"/>
+                </a:solidFill>
+                <a:latin typeface="+mn-lt"/>
+                <a:ea typeface="+mn-ea"/>
+                <a:cs typeface="+mn-cs"/>
+              </a:defRPr>
+            </a:lvl8pPr>
+            <a:lvl9pPr marL="3886200" indent="-228600" algn="l" defTabSz="914400" rtl="0" eaLnBrk="1" latinLnBrk="0" hangingPunct="1">
+              <a:lnSpc>
+                <a:spcPct val="90000"/>
+              </a:lnSpc>
+              <a:spcBef>
+                <a:spcPts val="500"/>
+              </a:spcBef>
+              <a:buFont typeface="Arial" panose="020B0604020202020204" pitchFamily="34" charset="0"/>
+              <a:buChar char="•"/>
+              <a:defRPr sz="1800" kern="1200">
+                <a:solidFill>
+                  <a:schemeClr val="tx1"/>
+                </a:solidFill>
+                <a:latin typeface="+mn-lt"/>
+                <a:ea typeface="+mn-ea"/>
+                <a:cs typeface="+mn-cs"/>
+              </a:defRPr>
+            </a:lvl9pPr>
+          </a:lstStyle>
+          <a:p>
+            <a:pPr marL="0" indent="0">
+              <a:buNone/>
+            </a:pPr>
+            <a:r>
+              <a:rPr lang="ru-RU" sz="2400" dirty="0"/>
+              <a:t>На этапах разработки и тестирования возникает потребность в изолированных копиях рабочих баз. Ручное создание копий для больших объёмов данных может занимать несколько часов. </a:t>
+            </a:r>
+            <a:br>
+              <a:rPr lang="ru-RU" sz="2400" dirty="0"/>
+            </a:br>
+            <a:r>
+              <a:rPr lang="ru-RU" sz="2400" dirty="0"/>
+              <a:t>Данное решение автоматизирует процесс клонирования, мгновенно разворачивая изолированные копии баз и предоставляя все инструменты управления в едином веб-интерфейсе.</a:t>
+            </a:r>
+            <a:endParaRPr lang="ru-RU" sz="2400" dirty="0">
+              <a:cs typeface="Times New Roman" panose="02020603050405020304" pitchFamily="18" charset="0"/>
+            </a:endParaRPr>
+          </a:p>
+        </p:txBody>
+      </p:sp>
+      <p:pic>
+        <p:nvPicPr>
+          <p:cNvPr id="10" name="Рисунок 9">
+            <a:extLst>
+              <a:ext uri="{FF2B5EF4-FFF2-40B4-BE49-F238E27FC236}">
+                <a16:creationId xmlns:a16="http://schemas.microsoft.com/office/drawing/2014/main" id="{FF44A41A-CD71-77CE-DD77-0B03E093C409}"/>
+              </a:ext>
+            </a:extLst>
+          </p:cNvPr>
+          <p:cNvPicPr>
+            <a:picLocks noChangeAspect="1"/>
+          </p:cNvPicPr>
+          <p:nvPr/>
+        </p:nvPicPr>
+        <p:blipFill>
+          <a:blip r:embed="rId3"/>
+          <a:stretch>
+            <a:fillRect/>
+          </a:stretch>
+        </p:blipFill>
+        <p:spPr>
+          <a:xfrm>
+            <a:off x="2820098" y="4359392"/>
+            <a:ext cx="2068650" cy="1684597"/>
+          </a:xfrm>
+          <a:prstGeom prst="rect">
+            <a:avLst/>
+          </a:prstGeom>
+        </p:spPr>
+      </p:pic>
+      <p:sp>
+        <p:nvSpPr>
+          <p:cNvPr id="11" name="Заголовок 1">
+            <a:extLst>
+              <a:ext uri="{FF2B5EF4-FFF2-40B4-BE49-F238E27FC236}">
+                <a16:creationId xmlns:a16="http://schemas.microsoft.com/office/drawing/2014/main" id="{A48D415A-7FC9-D96C-5703-760180D352A9}"/>
+              </a:ext>
+            </a:extLst>
+          </p:cNvPr>
+          <p:cNvSpPr txBox="1">
+            <a:spLocks/>
+          </p:cNvSpPr>
+          <p:nvPr/>
+        </p:nvSpPr>
+        <p:spPr>
+          <a:xfrm>
+            <a:off x="6974377" y="5997298"/>
+            <a:ext cx="872838" cy="531632"/>
+          </a:xfrm>
+          <a:prstGeom prst="rect">
+            <a:avLst/>
+          </a:prstGeom>
+        </p:spPr>
+        <p:txBody>
+          <a:bodyPr vert="horz" lIns="91440" tIns="45720" rIns="91440" bIns="45720" rtlCol="0" anchor="ctr">
+            <a:normAutofit fontScale="92500"/>
+          </a:bodyPr>
+          <a:lstStyle>
+            <a:lvl1pPr algn="l" defTabSz="914400" rtl="0" eaLnBrk="1" latinLnBrk="0" hangingPunct="1">
+              <a:lnSpc>
+                <a:spcPct val="90000"/>
+              </a:lnSpc>
+              <a:spcBef>
+                <a:spcPct val="0"/>
+              </a:spcBef>
+              <a:buNone/>
+              <a:defRPr sz="4400" kern="1200">
+                <a:solidFill>
+                  <a:schemeClr val="tx1"/>
+                </a:solidFill>
+                <a:latin typeface="+mj-lt"/>
+                <a:ea typeface="+mj-ea"/>
+                <a:cs typeface="+mj-cs"/>
+              </a:defRPr>
+            </a:lvl1pPr>
+          </a:lstStyle>
+          <a:p>
+            <a:r>
+              <a:rPr lang="ru-RU" sz="2400" b="1" dirty="0">
+                <a:latin typeface="+mn-lt"/>
+                <a:cs typeface="Times New Roman" panose="02020603050405020304" pitchFamily="18" charset="0"/>
+              </a:rPr>
+              <a:t>СУБД</a:t>
+            </a:r>
+          </a:p>
+        </p:txBody>
+      </p:sp>
+      <p:sp>
+        <p:nvSpPr>
+          <p:cNvPr id="12" name="Заголовок 1">
+            <a:extLst>
+              <a:ext uri="{FF2B5EF4-FFF2-40B4-BE49-F238E27FC236}">
+                <a16:creationId xmlns:a16="http://schemas.microsoft.com/office/drawing/2014/main" id="{DD5EA1B7-E286-3293-4DE8-8552DEE21911}"/>
+              </a:ext>
+            </a:extLst>
+          </p:cNvPr>
+          <p:cNvSpPr txBox="1">
+            <a:spLocks/>
+          </p:cNvSpPr>
+          <p:nvPr/>
+        </p:nvSpPr>
+        <p:spPr>
+          <a:xfrm>
+            <a:off x="3418004" y="5997298"/>
+            <a:ext cx="872838" cy="531632"/>
+          </a:xfrm>
+          <a:prstGeom prst="rect">
+            <a:avLst/>
+          </a:prstGeom>
+        </p:spPr>
+        <p:txBody>
+          <a:bodyPr vert="horz" lIns="91440" tIns="45720" rIns="91440" bIns="45720" rtlCol="0" anchor="ctr">
+            <a:normAutofit/>
+          </a:bodyPr>
+          <a:lstStyle>
+            <a:lvl1pPr algn="l" defTabSz="914400" rtl="0" eaLnBrk="1" latinLnBrk="0" hangingPunct="1">
+              <a:lnSpc>
+                <a:spcPct val="90000"/>
+              </a:lnSpc>
+              <a:spcBef>
+                <a:spcPct val="0"/>
+              </a:spcBef>
+              <a:buNone/>
+              <a:defRPr sz="4400" kern="1200">
+                <a:solidFill>
+                  <a:schemeClr val="tx1"/>
+                </a:solidFill>
+                <a:latin typeface="+mj-lt"/>
+                <a:ea typeface="+mj-ea"/>
+                <a:cs typeface="+mj-cs"/>
+              </a:defRPr>
+            </a:lvl1pPr>
+          </a:lstStyle>
+          <a:p>
+            <a:r>
+              <a:rPr lang="ru-RU" sz="2400" b="1" dirty="0">
+                <a:latin typeface="+mn-lt"/>
+                <a:cs typeface="Times New Roman" panose="02020603050405020304" pitchFamily="18" charset="0"/>
+              </a:rPr>
+              <a:t>БД</a:t>
+            </a:r>
           </a:p>
         </p:txBody>
       </p:sp>
@@ -6831,6 +7389,155 @@
               <a:rPr lang="en-US" b="1" dirty="0">
                 <a:latin typeface="+mn-lt"/>
               </a:rPr>
+              <a:t>ERD-</a:t>
+            </a:r>
+            <a:r>
+              <a:rPr lang="ru-RU" b="1" dirty="0">
+                <a:latin typeface="+mn-lt"/>
+              </a:rPr>
+              <a:t>диаграмма базы данных</a:t>
+            </a:r>
+          </a:p>
+        </p:txBody>
+      </p:sp>
+      <p:sp>
+        <p:nvSpPr>
+          <p:cNvPr id="3" name="Номер слайда 2">
+            <a:extLst>
+              <a:ext uri="{FF2B5EF4-FFF2-40B4-BE49-F238E27FC236}">
+                <a16:creationId xmlns:a16="http://schemas.microsoft.com/office/drawing/2014/main" id="{0CAAE307-F01B-B820-2B36-01BE70B7F5D2}"/>
+              </a:ext>
+            </a:extLst>
+          </p:cNvPr>
+          <p:cNvSpPr>
+            <a:spLocks noGrp="1"/>
+          </p:cNvSpPr>
+          <p:nvPr>
+            <p:ph type="sldNum" sz="quarter" idx="12"/>
+          </p:nvPr>
+        </p:nvSpPr>
+        <p:spPr/>
+        <p:txBody>
+          <a:bodyPr/>
+          <a:lstStyle/>
+          <a:p>
+            <a:fld id="{C792C54E-EFF1-4B00-8652-01128ACE980F}" type="slidenum">
+              <a:rPr lang="ru-RU" smtClean="0"/>
+              <a:pPr/>
+              <a:t>7</a:t>
+            </a:fld>
+            <a:endParaRPr lang="ru-RU"/>
+          </a:p>
+        </p:txBody>
+      </p:sp>
+      <p:pic>
+        <p:nvPicPr>
+          <p:cNvPr id="2054" name="Picture 6">
+            <a:extLst>
+              <a:ext uri="{FF2B5EF4-FFF2-40B4-BE49-F238E27FC236}">
+                <a16:creationId xmlns:a16="http://schemas.microsoft.com/office/drawing/2014/main" id="{5B4FA6F5-B8C2-D56A-DA24-2D975D94E247}"/>
+              </a:ext>
+            </a:extLst>
+          </p:cNvPr>
+          <p:cNvPicPr>
+            <a:picLocks noChangeAspect="1" noChangeArrowheads="1"/>
+          </p:cNvPicPr>
+          <p:nvPr/>
+        </p:nvPicPr>
+        <p:blipFill>
+          <a:blip r:embed="rId2">
+            <a:extLst>
+              <a:ext uri="{28A0092B-C50C-407E-A947-70E740481C1C}">
+                <a14:useLocalDpi xmlns:a14="http://schemas.microsoft.com/office/drawing/2010/main" val="0"/>
+              </a:ext>
+            </a:extLst>
+          </a:blip>
+          <a:srcRect/>
+          <a:stretch>
+            <a:fillRect/>
+          </a:stretch>
+        </p:blipFill>
+        <p:spPr bwMode="auto">
+          <a:xfrm>
+            <a:off x="438150" y="1817775"/>
+            <a:ext cx="11315700" cy="4248150"/>
+          </a:xfrm>
+          <a:prstGeom prst="rect">
+            <a:avLst/>
+          </a:prstGeom>
+          <a:noFill/>
+          <a:extLst>
+            <a:ext uri="{909E8E84-426E-40DD-AFC4-6F175D3DCCD1}">
+              <a14:hiddenFill xmlns:a14="http://schemas.microsoft.com/office/drawing/2010/main">
+                <a:solidFill>
+                  <a:srgbClr val="FFFFFF"/>
+                </a:solidFill>
+              </a14:hiddenFill>
+            </a:ext>
+          </a:extLst>
+        </p:spPr>
+      </p:pic>
+    </p:spTree>
+  </p:cSld>
+  <p:clrMapOvr>
+    <a:masterClrMapping/>
+  </p:clrMapOvr>
+</p:sld>
+</file>
+
+<file path=ppt/slides/slide8.xml><?xml version="1.0" encoding="utf-8"?>
+<p:sld xmlns:a="http://schemas.openxmlformats.org/drawingml/2006/main" xmlns:r="http://schemas.openxmlformats.org/officeDocument/2006/relationships" xmlns:p="http://schemas.openxmlformats.org/presentationml/2006/main">
+  <p:cSld>
+    <p:spTree>
+      <p:nvGrpSpPr>
+        <p:cNvPr id="1" name="">
+          <a:extLst>
+            <a:ext uri="{FF2B5EF4-FFF2-40B4-BE49-F238E27FC236}">
+              <a16:creationId xmlns:a16="http://schemas.microsoft.com/office/drawing/2014/main" id="{0C418461-C61A-A580-567E-A18F9FE60A8A}"/>
+            </a:ext>
+          </a:extLst>
+        </p:cNvPr>
+        <p:cNvGrpSpPr/>
+        <p:nvPr/>
+      </p:nvGrpSpPr>
+      <p:grpSpPr>
+        <a:xfrm>
+          <a:off x="0" y="0"/>
+          <a:ext cx="0" cy="0"/>
+          <a:chOff x="0" y="0"/>
+          <a:chExt cx="0" cy="0"/>
+        </a:xfrm>
+      </p:grpSpPr>
+      <p:sp>
+        <p:nvSpPr>
+          <p:cNvPr id="2" name="Заголовок 1">
+            <a:extLst>
+              <a:ext uri="{FF2B5EF4-FFF2-40B4-BE49-F238E27FC236}">
+                <a16:creationId xmlns:a16="http://schemas.microsoft.com/office/drawing/2014/main" id="{EE5F4C93-3B6A-3ABF-DE85-AAA0BE39B95A}"/>
+              </a:ext>
+            </a:extLst>
+          </p:cNvPr>
+          <p:cNvSpPr>
+            <a:spLocks noGrp="1"/>
+          </p:cNvSpPr>
+          <p:nvPr>
+            <p:ph type="title"/>
+          </p:nvPr>
+        </p:nvSpPr>
+        <p:spPr>
+          <a:xfrm>
+            <a:off x="838200" y="201787"/>
+            <a:ext cx="10515600" cy="1325563"/>
+          </a:xfrm>
+        </p:spPr>
+        <p:txBody>
+          <a:bodyPr/>
+          <a:lstStyle/>
+          <a:p>
+            <a:r>
+              <a:rPr lang="en-US" b="1" dirty="0">
+                <a:latin typeface="+mn-lt"/>
+              </a:rPr>
               <a:t>UML</a:t>
             </a:r>
             <a:r>
@@ -6847,7 +7554,7 @@
           <p:cNvPr id="6" name="Рисунок 5">
             <a:extLst>
               <a:ext uri="{FF2B5EF4-FFF2-40B4-BE49-F238E27FC236}">
-                <a16:creationId xmlns:a16="http://schemas.microsoft.com/office/drawing/2014/main" id="{C419B42E-70DE-7647-5BC8-A510B3C96B81}"/>
+                <a16:creationId xmlns:a16="http://schemas.microsoft.com/office/drawing/2014/main" id="{5FF461BA-E3AD-7481-95A0-F812771A6BD4}"/>
               </a:ext>
             </a:extLst>
           </p:cNvPr>
@@ -6883,7 +7590,7 @@
           <p:cNvPr id="3" name="Номер слайда 2">
             <a:extLst>
               <a:ext uri="{FF2B5EF4-FFF2-40B4-BE49-F238E27FC236}">
-                <a16:creationId xmlns:a16="http://schemas.microsoft.com/office/drawing/2014/main" id="{0CAAE307-F01B-B820-2B36-01BE70B7F5D2}"/>
+                <a16:creationId xmlns:a16="http://schemas.microsoft.com/office/drawing/2014/main" id="{F67DEC4D-1FE9-1EA8-0EC8-5107BD69B3D4}"/>
               </a:ext>
             </a:extLst>
           </p:cNvPr>
@@ -6902,13 +7609,18 @@
             <a:fld id="{C792C54E-EFF1-4B00-8652-01128ACE980F}" type="slidenum">
               <a:rPr lang="ru-RU" smtClean="0"/>
               <a:pPr/>
-              <a:t>7</a:t>
+              <a:t>8</a:t>
             </a:fld>
             <a:endParaRPr lang="ru-RU"/>
           </a:p>
         </p:txBody>
       </p:sp>
     </p:spTree>
+    <p:extLst>
+      <p:ext uri="{BB962C8B-B14F-4D97-AF65-F5344CB8AC3E}">
+        <p14:creationId xmlns:p14="http://schemas.microsoft.com/office/powerpoint/2010/main" val="2259160281"/>
+      </p:ext>
+    </p:extLst>
   </p:cSld>
   <p:clrMapOvr>
     <a:masterClrMapping/>
@@ -6916,7 +7628,7 @@
 </p:sld>
 </file>
 
-<file path=ppt/slides/slide8.xml><?xml version="1.0" encoding="utf-8"?>
+<file path=ppt/slides/slide9.xml><?xml version="1.0" encoding="utf-8"?>
 <p:sld xmlns:a="http://schemas.openxmlformats.org/drawingml/2006/main" xmlns:r="http://schemas.openxmlformats.org/officeDocument/2006/relationships" xmlns:p="http://schemas.openxmlformats.org/presentationml/2006/main">
   <p:cSld>
     <p:spTree>
@@ -7045,7 +7757,7 @@
             <a:fld id="{C792C54E-EFF1-4B00-8652-01128ACE980F}" type="slidenum">
               <a:rPr lang="ru-RU" smtClean="0"/>
               <a:pPr/>
-              <a:t>8</a:t>
+              <a:t>9</a:t>
             </a:fld>
             <a:endParaRPr lang="ru-RU"/>
           </a:p>
@@ -7150,223 +7862,6 @@
     <p:extLst>
       <p:ext uri="{BB962C8B-B14F-4D97-AF65-F5344CB8AC3E}">
         <p14:creationId xmlns:p14="http://schemas.microsoft.com/office/powerpoint/2010/main" val="248056189"/>
-      </p:ext>
-    </p:extLst>
-  </p:cSld>
-  <p:clrMapOvr>
-    <a:masterClrMapping/>
-  </p:clrMapOvr>
-</p:sld>
-</file>
-
-<file path=ppt/slides/slide9.xml><?xml version="1.0" encoding="utf-8"?>
-<p:sld xmlns:a="http://schemas.openxmlformats.org/drawingml/2006/main" xmlns:r="http://schemas.openxmlformats.org/officeDocument/2006/relationships" xmlns:p="http://schemas.openxmlformats.org/presentationml/2006/main">
-  <p:cSld>
-    <p:spTree>
-      <p:nvGrpSpPr>
-        <p:cNvPr id="1" name="">
-          <a:extLst>
-            <a:ext uri="{FF2B5EF4-FFF2-40B4-BE49-F238E27FC236}">
-              <a16:creationId xmlns:a16="http://schemas.microsoft.com/office/drawing/2014/main" id="{2CF80C0C-3D0B-4798-D0F8-D8BC6E18188C}"/>
-            </a:ext>
-          </a:extLst>
-        </p:cNvPr>
-        <p:cNvGrpSpPr/>
-        <p:nvPr/>
-      </p:nvGrpSpPr>
-      <p:grpSpPr>
-        <a:xfrm>
-          <a:off x="0" y="0"/>
-          <a:ext cx="0" cy="0"/>
-          <a:chOff x="0" y="0"/>
-          <a:chExt cx="0" cy="0"/>
-        </a:xfrm>
-      </p:grpSpPr>
-      <p:pic>
-        <p:nvPicPr>
-          <p:cNvPr id="4100" name="Picture 4">
-            <a:extLst>
-              <a:ext uri="{FF2B5EF4-FFF2-40B4-BE49-F238E27FC236}">
-                <a16:creationId xmlns:a16="http://schemas.microsoft.com/office/drawing/2014/main" id="{A5D6C6DE-E43A-F39F-75D2-1104F71AFED0}"/>
-              </a:ext>
-            </a:extLst>
-          </p:cNvPr>
-          <p:cNvPicPr>
-            <a:picLocks noChangeAspect="1" noChangeArrowheads="1"/>
-          </p:cNvPicPr>
-          <p:nvPr/>
-        </p:nvPicPr>
-        <p:blipFill>
-          <a:blip r:embed="rId2">
-            <a:extLst>
-              <a:ext uri="{28A0092B-C50C-407E-A947-70E740481C1C}">
-                <a14:useLocalDpi xmlns:a14="http://schemas.microsoft.com/office/drawing/2010/main" val="0"/>
-              </a:ext>
-            </a:extLst>
-          </a:blip>
-          <a:srcRect/>
-          <a:stretch>
-            <a:fillRect/>
-          </a:stretch>
-        </p:blipFill>
-        <p:spPr bwMode="auto">
-          <a:xfrm>
-            <a:off x="838200" y="1314335"/>
-            <a:ext cx="9920098" cy="4541545"/>
-          </a:xfrm>
-          <a:prstGeom prst="rect">
-            <a:avLst/>
-          </a:prstGeom>
-          <a:noFill/>
-          <a:extLst>
-            <a:ext uri="{909E8E84-426E-40DD-AFC4-6F175D3DCCD1}">
-              <a14:hiddenFill xmlns:a14="http://schemas.microsoft.com/office/drawing/2010/main">
-                <a:solidFill>
-                  <a:srgbClr val="FFFFFF"/>
-                </a:solidFill>
-              </a14:hiddenFill>
-            </a:ext>
-          </a:extLst>
-        </p:spPr>
-      </p:pic>
-      <p:sp>
-        <p:nvSpPr>
-          <p:cNvPr id="2" name="Заголовок 1">
-            <a:extLst>
-              <a:ext uri="{FF2B5EF4-FFF2-40B4-BE49-F238E27FC236}">
-                <a16:creationId xmlns:a16="http://schemas.microsoft.com/office/drawing/2014/main" id="{AF753F7E-A2DB-E46D-1FCB-FCA6AF55694C}"/>
-              </a:ext>
-            </a:extLst>
-          </p:cNvPr>
-          <p:cNvSpPr>
-            <a:spLocks noGrp="1"/>
-          </p:cNvSpPr>
-          <p:nvPr>
-            <p:ph type="title"/>
-          </p:nvPr>
-        </p:nvSpPr>
-        <p:spPr>
-          <a:xfrm>
-            <a:off x="838200" y="0"/>
-            <a:ext cx="10515600" cy="1325563"/>
-          </a:xfrm>
-        </p:spPr>
-        <p:txBody>
-          <a:bodyPr/>
-          <a:lstStyle/>
-          <a:p>
-            <a:r>
-              <a:rPr lang="ru-RU" b="1" dirty="0">
-                <a:latin typeface="+mn-lt"/>
-              </a:rPr>
-              <a:t>Интерфейс продукта</a:t>
-            </a:r>
-          </a:p>
-        </p:txBody>
-      </p:sp>
-      <p:sp>
-        <p:nvSpPr>
-          <p:cNvPr id="3" name="Номер слайда 2">
-            <a:extLst>
-              <a:ext uri="{FF2B5EF4-FFF2-40B4-BE49-F238E27FC236}">
-                <a16:creationId xmlns:a16="http://schemas.microsoft.com/office/drawing/2014/main" id="{2660AD78-9BD8-56CD-7F5C-A3277723456C}"/>
-              </a:ext>
-            </a:extLst>
-          </p:cNvPr>
-          <p:cNvSpPr>
-            <a:spLocks noGrp="1"/>
-          </p:cNvSpPr>
-          <p:nvPr>
-            <p:ph type="sldNum" sz="quarter" idx="12"/>
-          </p:nvPr>
-        </p:nvSpPr>
-        <p:spPr/>
-        <p:txBody>
-          <a:bodyPr/>
-          <a:lstStyle/>
-          <a:p>
-            <a:fld id="{C792C54E-EFF1-4B00-8652-01128ACE980F}" type="slidenum">
-              <a:rPr lang="ru-RU" smtClean="0"/>
-              <a:pPr/>
-              <a:t>9</a:t>
-            </a:fld>
-            <a:endParaRPr lang="ru-RU"/>
-          </a:p>
-        </p:txBody>
-      </p:sp>
-      <p:sp>
-        <p:nvSpPr>
-          <p:cNvPr id="4" name="Объект 6">
-            <a:extLst>
-              <a:ext uri="{FF2B5EF4-FFF2-40B4-BE49-F238E27FC236}">
-                <a16:creationId xmlns:a16="http://schemas.microsoft.com/office/drawing/2014/main" id="{90E6089E-48E2-B130-19F5-4D73C148931F}"/>
-              </a:ext>
-            </a:extLst>
-          </p:cNvPr>
-          <p:cNvSpPr>
-            <a:spLocks noGrp="1"/>
-          </p:cNvSpPr>
-          <p:nvPr>
-            <p:ph idx="1"/>
-          </p:nvPr>
-        </p:nvSpPr>
-        <p:spPr>
-          <a:xfrm>
-            <a:off x="3846022" y="5892166"/>
-            <a:ext cx="4764578" cy="391402"/>
-          </a:xfrm>
-        </p:spPr>
-        <p:txBody>
-          <a:bodyPr>
-            <a:normAutofit lnSpcReduction="10000"/>
-          </a:bodyPr>
-          <a:lstStyle/>
-          <a:p>
-            <a:pPr marL="0" indent="0">
-              <a:buNone/>
-            </a:pPr>
-            <a:r>
-              <a:rPr lang="ru-RU" sz="2400" dirty="0">
-                <a:cs typeface="Times New Roman" panose="02020603050405020304" pitchFamily="18" charset="0"/>
-              </a:rPr>
-              <a:t>Страница </a:t>
-            </a:r>
-            <a:r>
-              <a:rPr lang="en-US" sz="2400" dirty="0">
-                <a:cs typeface="Times New Roman" panose="02020603050405020304" pitchFamily="18" charset="0"/>
-              </a:rPr>
-              <a:t>“</a:t>
-            </a:r>
-            <a:r>
-              <a:rPr lang="ru-RU" sz="2400" dirty="0">
-                <a:cs typeface="Times New Roman" panose="02020603050405020304" pitchFamily="18" charset="0"/>
-              </a:rPr>
-              <a:t>Управление образами</a:t>
-            </a:r>
-            <a:r>
-              <a:rPr lang="en-US" sz="2400" dirty="0">
-                <a:cs typeface="Times New Roman" panose="02020603050405020304" pitchFamily="18" charset="0"/>
-              </a:rPr>
-              <a:t>”</a:t>
-            </a:r>
-            <a:endParaRPr lang="ru-RU" sz="2400" dirty="0">
-              <a:cs typeface="Times New Roman" panose="02020603050405020304" pitchFamily="18" charset="0"/>
-            </a:endParaRPr>
-          </a:p>
-          <a:p>
-            <a:pPr marL="0" indent="0">
-              <a:buNone/>
-            </a:pPr>
-            <a:endParaRPr lang="ru-RU" sz="2400" dirty="0">
-              <a:cs typeface="Times New Roman" panose="02020603050405020304" pitchFamily="18" charset="0"/>
-            </a:endParaRPr>
-          </a:p>
-        </p:txBody>
-      </p:sp>
-    </p:spTree>
-    <p:extLst>
-      <p:ext uri="{BB962C8B-B14F-4D97-AF65-F5344CB8AC3E}">
-        <p14:creationId xmlns:p14="http://schemas.microsoft.com/office/powerpoint/2010/main" val="3313401522"/>
       </p:ext>
     </p:extLst>
   </p:cSld>

--- a/Диплом/Презентация/Бородина_Анастасия_Владимировна_2207Д2_06.05.26.pptx
+++ b/Диплом/Презентация/Бородина_Анастасия_Владимировна_2207Д2_06.05.26.pptx
@@ -224,7 +224,7 @@
             <a:fld id="{2CBAF322-1614-4B94-B6A1-B76658E349DC}" type="datetimeFigureOut">
               <a:rPr lang="ru-RU" smtClean="0"/>
               <a:pPr/>
-              <a:t>08.05.2026</a:t>
+              <a:t>14.05.2026</a:t>
             </a:fld>
             <a:endParaRPr lang="ru-RU"/>
           </a:p>
@@ -639,7 +639,7 @@
           <a:p>
             <a:fld id="{929F2640-2EF4-4A43-9842-276C25197E25}" type="datetime1">
               <a:rPr lang="ru-RU" smtClean="0"/>
-              <a:t>08.05.2026</a:t>
+              <a:t>14.05.2026</a:t>
             </a:fld>
             <a:endParaRPr lang="ru-RU"/>
           </a:p>
@@ -838,7 +838,7 @@
           <a:p>
             <a:fld id="{FA7AEEE2-DC8F-4C66-9038-4CB95A7529D0}" type="datetime1">
               <a:rPr lang="ru-RU" smtClean="0"/>
-              <a:t>08.05.2026</a:t>
+              <a:t>14.05.2026</a:t>
             </a:fld>
             <a:endParaRPr lang="ru-RU"/>
           </a:p>
@@ -1047,7 +1047,7 @@
           <a:p>
             <a:fld id="{E86C36E5-C478-443C-BAEF-26B63FBE0A6B}" type="datetime1">
               <a:rPr lang="ru-RU" smtClean="0"/>
-              <a:t>08.05.2026</a:t>
+              <a:t>14.05.2026</a:t>
             </a:fld>
             <a:endParaRPr lang="ru-RU"/>
           </a:p>
@@ -1246,7 +1246,7 @@
           <a:p>
             <a:fld id="{1D830A2B-E972-4650-9194-9F682251A062}" type="datetime1">
               <a:rPr lang="ru-RU" smtClean="0"/>
-              <a:t>08.05.2026</a:t>
+              <a:t>14.05.2026</a:t>
             </a:fld>
             <a:endParaRPr lang="ru-RU"/>
           </a:p>
@@ -1522,7 +1522,7 @@
           <a:p>
             <a:fld id="{73089D3F-9628-40A0-8CDF-BFC5BF8A512E}" type="datetime1">
               <a:rPr lang="ru-RU" smtClean="0"/>
-              <a:t>08.05.2026</a:t>
+              <a:t>14.05.2026</a:t>
             </a:fld>
             <a:endParaRPr lang="ru-RU"/>
           </a:p>
@@ -1788,7 +1788,7 @@
           <a:p>
             <a:fld id="{994FC618-F43D-4137-885A-9D660F20BABE}" type="datetime1">
               <a:rPr lang="ru-RU" smtClean="0"/>
-              <a:t>08.05.2026</a:t>
+              <a:t>14.05.2026</a:t>
             </a:fld>
             <a:endParaRPr lang="ru-RU"/>
           </a:p>
@@ -2201,7 +2201,7 @@
           <a:p>
             <a:fld id="{68F59E0F-81D3-46F2-A21F-80B324275C0B}" type="datetime1">
               <a:rPr lang="ru-RU" smtClean="0"/>
-              <a:t>08.05.2026</a:t>
+              <a:t>14.05.2026</a:t>
             </a:fld>
             <a:endParaRPr lang="ru-RU"/>
           </a:p>
@@ -2343,7 +2343,7 @@
           <a:p>
             <a:fld id="{CBDF851B-9994-4471-A95F-63C98C94C25C}" type="datetime1">
               <a:rPr lang="ru-RU" smtClean="0"/>
-              <a:t>08.05.2026</a:t>
+              <a:t>14.05.2026</a:t>
             </a:fld>
             <a:endParaRPr lang="ru-RU"/>
           </a:p>
@@ -2457,7 +2457,7 @@
           <a:p>
             <a:fld id="{FE9C0E54-4CC8-47B6-A2ED-519E308C3D5C}" type="datetime1">
               <a:rPr lang="ru-RU" smtClean="0"/>
-              <a:t>08.05.2026</a:t>
+              <a:t>14.05.2026</a:t>
             </a:fld>
             <a:endParaRPr lang="ru-RU"/>
           </a:p>
@@ -2769,7 +2769,7 @@
           <a:p>
             <a:fld id="{B148578A-6CC4-494D-9939-AE0BC863DCC9}" type="datetime1">
               <a:rPr lang="ru-RU" smtClean="0"/>
-              <a:t>08.05.2026</a:t>
+              <a:t>14.05.2026</a:t>
             </a:fld>
             <a:endParaRPr lang="ru-RU"/>
           </a:p>
@@ -3058,7 +3058,7 @@
           <a:p>
             <a:fld id="{0D930757-F38F-41AC-A030-FD2A4ED4502C}" type="datetime1">
               <a:rPr lang="ru-RU" smtClean="0"/>
-              <a:t>08.05.2026</a:t>
+              <a:t>14.05.2026</a:t>
             </a:fld>
             <a:endParaRPr lang="ru-RU"/>
           </a:p>
@@ -3300,7 +3300,7 @@
           <a:p>
             <a:fld id="{FDEF9CD6-0EBB-4035-B231-EA9AEF8C103A}" type="datetime1">
               <a:rPr lang="ru-RU" smtClean="0"/>
-              <a:t>08.05.2026</a:t>
+              <a:t>14.05.2026</a:t>
             </a:fld>
             <a:endParaRPr lang="ru-RU"/>
           </a:p>
@@ -4339,6 +4339,53 @@
           </a:p>
         </p:txBody>
       </p:sp>
+      <p:pic>
+        <p:nvPicPr>
+          <p:cNvPr id="3074" name="Picture 2">
+            <a:extLst>
+              <a:ext uri="{FF2B5EF4-FFF2-40B4-BE49-F238E27FC236}">
+                <a16:creationId xmlns:a16="http://schemas.microsoft.com/office/drawing/2014/main" id="{710E5EB1-FEDC-6225-86A9-B41F85CF493C}"/>
+              </a:ext>
+            </a:extLst>
+          </p:cNvPr>
+          <p:cNvPicPr>
+            <a:picLocks noChangeAspect="1" noChangeArrowheads="1"/>
+          </p:cNvPicPr>
+          <p:nvPr/>
+        </p:nvPicPr>
+        <p:blipFill>
+          <a:blip r:embed="rId3">
+            <a:extLst>
+              <a:ext uri="{28A0092B-C50C-407E-A947-70E740481C1C}">
+                <a14:useLocalDpi xmlns:a14="http://schemas.microsoft.com/office/drawing/2010/main" val="0"/>
+              </a:ext>
+            </a:extLst>
+          </a:blip>
+          <a:srcRect/>
+          <a:stretch>
+            <a:fillRect/>
+          </a:stretch>
+        </p:blipFill>
+        <p:spPr bwMode="auto">
+          <a:xfrm>
+            <a:off x="773084" y="1218853"/>
+            <a:ext cx="10166465" cy="4692723"/>
+          </a:xfrm>
+          <a:prstGeom prst="rect">
+            <a:avLst/>
+          </a:prstGeom>
+          <a:noFill/>
+          <a:extLst>
+            <a:ext uri="{909E8E84-426E-40DD-AFC4-6F175D3DCCD1}">
+              <a14:hiddenFill xmlns:a14="http://schemas.microsoft.com/office/drawing/2010/main">
+                <a:solidFill>
+                  <a:srgbClr val="FFFFFF"/>
+                </a:solidFill>
+              </a14:hiddenFill>
+            </a:ext>
+          </a:extLst>
+        </p:spPr>
+      </p:pic>
     </p:spTree>
     <p:extLst>
       <p:ext uri="{BB962C8B-B14F-4D97-AF65-F5344CB8AC3E}">
@@ -4375,12 +4422,149 @@
           <a:chExt cx="0" cy="0"/>
         </a:xfrm>
       </p:grpSpPr>
+      <p:sp>
+        <p:nvSpPr>
+          <p:cNvPr id="2" name="Заголовок 1">
+            <a:extLst>
+              <a:ext uri="{FF2B5EF4-FFF2-40B4-BE49-F238E27FC236}">
+                <a16:creationId xmlns:a16="http://schemas.microsoft.com/office/drawing/2014/main" id="{18E88D18-3A2A-0F72-E776-B12DD11F4BD0}"/>
+              </a:ext>
+            </a:extLst>
+          </p:cNvPr>
+          <p:cNvSpPr>
+            <a:spLocks noGrp="1"/>
+          </p:cNvSpPr>
+          <p:nvPr>
+            <p:ph type="title"/>
+          </p:nvPr>
+        </p:nvSpPr>
+        <p:spPr>
+          <a:xfrm>
+            <a:off x="838200" y="0"/>
+            <a:ext cx="10515600" cy="1325563"/>
+          </a:xfrm>
+        </p:spPr>
+        <p:txBody>
+          <a:bodyPr/>
+          <a:lstStyle/>
+          <a:p>
+            <a:r>
+              <a:rPr lang="ru-RU" b="1" dirty="0">
+                <a:latin typeface="+mn-lt"/>
+              </a:rPr>
+              <a:t>Интерфейс продукта</a:t>
+            </a:r>
+          </a:p>
+        </p:txBody>
+      </p:sp>
+      <p:sp>
+        <p:nvSpPr>
+          <p:cNvPr id="3" name="Номер слайда 2">
+            <a:extLst>
+              <a:ext uri="{FF2B5EF4-FFF2-40B4-BE49-F238E27FC236}">
+                <a16:creationId xmlns:a16="http://schemas.microsoft.com/office/drawing/2014/main" id="{2E84D0FD-854F-8EFB-F670-76F907CE2AC1}"/>
+              </a:ext>
+            </a:extLst>
+          </p:cNvPr>
+          <p:cNvSpPr>
+            <a:spLocks noGrp="1"/>
+          </p:cNvSpPr>
+          <p:nvPr>
+            <p:ph type="sldNum" sz="quarter" idx="12"/>
+          </p:nvPr>
+        </p:nvSpPr>
+        <p:spPr/>
+        <p:txBody>
+          <a:bodyPr/>
+          <a:lstStyle/>
+          <a:p>
+            <a:fld id="{C792C54E-EFF1-4B00-8652-01128ACE980F}" type="slidenum">
+              <a:rPr lang="ru-RU" smtClean="0"/>
+              <a:pPr/>
+              <a:t>11</a:t>
+            </a:fld>
+            <a:endParaRPr lang="ru-RU"/>
+          </a:p>
+        </p:txBody>
+      </p:sp>
+      <p:sp>
+        <p:nvSpPr>
+          <p:cNvPr id="4" name="Объект 6">
+            <a:extLst>
+              <a:ext uri="{FF2B5EF4-FFF2-40B4-BE49-F238E27FC236}">
+                <a16:creationId xmlns:a16="http://schemas.microsoft.com/office/drawing/2014/main" id="{BA899F52-370B-373B-EEE8-CA574ABF183A}"/>
+              </a:ext>
+            </a:extLst>
+          </p:cNvPr>
+          <p:cNvSpPr>
+            <a:spLocks noGrp="1"/>
+          </p:cNvSpPr>
+          <p:nvPr>
+            <p:ph idx="1"/>
+          </p:nvPr>
+        </p:nvSpPr>
+        <p:spPr>
+          <a:xfrm>
+            <a:off x="2412076" y="5955464"/>
+            <a:ext cx="7367848" cy="558510"/>
+          </a:xfrm>
+        </p:spPr>
+        <p:txBody>
+          <a:bodyPr>
+            <a:normAutofit fontScale="92500"/>
+          </a:bodyPr>
+          <a:lstStyle/>
+          <a:p>
+            <a:pPr marL="0" indent="0">
+              <a:buNone/>
+            </a:pPr>
+            <a:r>
+              <a:rPr lang="ru-RU" sz="2400" dirty="0">
+                <a:cs typeface="Times New Roman" panose="02020603050405020304" pitchFamily="18" charset="0"/>
+              </a:rPr>
+              <a:t>Страница </a:t>
+            </a:r>
+            <a:r>
+              <a:rPr lang="en-US" sz="2400" dirty="0">
+                <a:cs typeface="Times New Roman" panose="02020603050405020304" pitchFamily="18" charset="0"/>
+              </a:rPr>
+              <a:t>“</a:t>
+            </a:r>
+            <a:r>
+              <a:rPr lang="ru-RU" sz="2400" dirty="0">
+                <a:cs typeface="Times New Roman" panose="02020603050405020304" pitchFamily="18" charset="0"/>
+              </a:rPr>
+              <a:t>Управление образами</a:t>
+            </a:r>
+            <a:r>
+              <a:rPr lang="en-US" sz="2400" dirty="0">
+                <a:cs typeface="Times New Roman" panose="02020603050405020304" pitchFamily="18" charset="0"/>
+              </a:rPr>
+              <a:t>”</a:t>
+            </a:r>
+            <a:r>
+              <a:rPr lang="ru-RU" sz="2400" dirty="0">
+                <a:cs typeface="Times New Roman" panose="02020603050405020304" pitchFamily="18" charset="0"/>
+              </a:rPr>
+              <a:t>, окно создания образа</a:t>
+            </a:r>
+          </a:p>
+          <a:p>
+            <a:pPr marL="0" indent="0">
+              <a:buNone/>
+            </a:pPr>
+            <a:endParaRPr lang="ru-RU" sz="2400" dirty="0">
+              <a:cs typeface="Times New Roman" panose="02020603050405020304" pitchFamily="18" charset="0"/>
+            </a:endParaRPr>
+          </a:p>
+        </p:txBody>
+      </p:sp>
       <p:pic>
         <p:nvPicPr>
-          <p:cNvPr id="7170" name="Picture 2">
-            <a:extLst>
-              <a:ext uri="{FF2B5EF4-FFF2-40B4-BE49-F238E27FC236}">
-                <a16:creationId xmlns:a16="http://schemas.microsoft.com/office/drawing/2014/main" id="{B306B862-B540-2C59-EC13-31C1FCD8FCA1}"/>
+          <p:cNvPr id="2052" name="Picture 4">
+            <a:extLst>
+              <a:ext uri="{FF2B5EF4-FFF2-40B4-BE49-F238E27FC236}">
+                <a16:creationId xmlns:a16="http://schemas.microsoft.com/office/drawing/2014/main" id="{E561B3CD-EE5F-3D77-38C7-69AF94BE2E22}"/>
               </a:ext>
             </a:extLst>
           </p:cNvPr>
@@ -4404,8 +4588,8 @@
         </p:blipFill>
         <p:spPr bwMode="auto">
           <a:xfrm>
-            <a:off x="838200" y="1314335"/>
-            <a:ext cx="9840380" cy="4540925"/>
+            <a:off x="563880" y="984795"/>
+            <a:ext cx="10789920" cy="4970669"/>
           </a:xfrm>
           <a:prstGeom prst="rect">
             <a:avLst/>
@@ -4422,143 +4606,6 @@
           </a:extLst>
         </p:spPr>
       </p:pic>
-      <p:sp>
-        <p:nvSpPr>
-          <p:cNvPr id="2" name="Заголовок 1">
-            <a:extLst>
-              <a:ext uri="{FF2B5EF4-FFF2-40B4-BE49-F238E27FC236}">
-                <a16:creationId xmlns:a16="http://schemas.microsoft.com/office/drawing/2014/main" id="{18E88D18-3A2A-0F72-E776-B12DD11F4BD0}"/>
-              </a:ext>
-            </a:extLst>
-          </p:cNvPr>
-          <p:cNvSpPr>
-            <a:spLocks noGrp="1"/>
-          </p:cNvSpPr>
-          <p:nvPr>
-            <p:ph type="title"/>
-          </p:nvPr>
-        </p:nvSpPr>
-        <p:spPr>
-          <a:xfrm>
-            <a:off x="838200" y="0"/>
-            <a:ext cx="10515600" cy="1325563"/>
-          </a:xfrm>
-        </p:spPr>
-        <p:txBody>
-          <a:bodyPr/>
-          <a:lstStyle/>
-          <a:p>
-            <a:r>
-              <a:rPr lang="ru-RU" b="1" dirty="0">
-                <a:latin typeface="+mn-lt"/>
-              </a:rPr>
-              <a:t>Интерфейс продукта</a:t>
-            </a:r>
-          </a:p>
-        </p:txBody>
-      </p:sp>
-      <p:sp>
-        <p:nvSpPr>
-          <p:cNvPr id="3" name="Номер слайда 2">
-            <a:extLst>
-              <a:ext uri="{FF2B5EF4-FFF2-40B4-BE49-F238E27FC236}">
-                <a16:creationId xmlns:a16="http://schemas.microsoft.com/office/drawing/2014/main" id="{2E84D0FD-854F-8EFB-F670-76F907CE2AC1}"/>
-              </a:ext>
-            </a:extLst>
-          </p:cNvPr>
-          <p:cNvSpPr>
-            <a:spLocks noGrp="1"/>
-          </p:cNvSpPr>
-          <p:nvPr>
-            <p:ph type="sldNum" sz="quarter" idx="12"/>
-          </p:nvPr>
-        </p:nvSpPr>
-        <p:spPr/>
-        <p:txBody>
-          <a:bodyPr/>
-          <a:lstStyle/>
-          <a:p>
-            <a:fld id="{C792C54E-EFF1-4B00-8652-01128ACE980F}" type="slidenum">
-              <a:rPr lang="ru-RU" smtClean="0"/>
-              <a:pPr/>
-              <a:t>11</a:t>
-            </a:fld>
-            <a:endParaRPr lang="ru-RU"/>
-          </a:p>
-        </p:txBody>
-      </p:sp>
-      <p:sp>
-        <p:nvSpPr>
-          <p:cNvPr id="4" name="Объект 6">
-            <a:extLst>
-              <a:ext uri="{FF2B5EF4-FFF2-40B4-BE49-F238E27FC236}">
-                <a16:creationId xmlns:a16="http://schemas.microsoft.com/office/drawing/2014/main" id="{BA899F52-370B-373B-EEE8-CA574ABF183A}"/>
-              </a:ext>
-            </a:extLst>
-          </p:cNvPr>
-          <p:cNvSpPr>
-            <a:spLocks noGrp="1"/>
-          </p:cNvSpPr>
-          <p:nvPr>
-            <p:ph idx="1"/>
-          </p:nvPr>
-        </p:nvSpPr>
-        <p:spPr>
-          <a:xfrm>
-            <a:off x="2412076" y="5955464"/>
-            <a:ext cx="7367848" cy="558510"/>
-          </a:xfrm>
-        </p:spPr>
-        <p:txBody>
-          <a:bodyPr>
-            <a:normAutofit fontScale="92500"/>
-          </a:bodyPr>
-          <a:lstStyle/>
-          <a:p>
-            <a:pPr marL="0" indent="0">
-              <a:buNone/>
-            </a:pPr>
-            <a:r>
-              <a:rPr lang="ru-RU" sz="2400" dirty="0">
-                <a:cs typeface="Times New Roman" panose="02020603050405020304" pitchFamily="18" charset="0"/>
-              </a:rPr>
-              <a:t>Страница </a:t>
-            </a:r>
-            <a:r>
-              <a:rPr lang="en-US" sz="2400" dirty="0">
-                <a:cs typeface="Times New Roman" panose="02020603050405020304" pitchFamily="18" charset="0"/>
-              </a:rPr>
-              <a:t>“</a:t>
-            </a:r>
-            <a:r>
-              <a:rPr lang="ru-RU" sz="2400" dirty="0">
-                <a:cs typeface="Times New Roman" panose="02020603050405020304" pitchFamily="18" charset="0"/>
-              </a:rPr>
-              <a:t>Управление образами</a:t>
-            </a:r>
-            <a:r>
-              <a:rPr lang="en-US" sz="2400" dirty="0">
-                <a:cs typeface="Times New Roman" panose="02020603050405020304" pitchFamily="18" charset="0"/>
-              </a:rPr>
-              <a:t>”</a:t>
-            </a:r>
-            <a:r>
-              <a:rPr lang="ru-RU" sz="2400" dirty="0">
-                <a:cs typeface="Times New Roman" panose="02020603050405020304" pitchFamily="18" charset="0"/>
-              </a:rPr>
-              <a:t>, окно создания образа</a:t>
-            </a:r>
-          </a:p>
-          <a:p>
-            <a:pPr marL="0" indent="0">
-              <a:buNone/>
-            </a:pPr>
-            <a:endParaRPr lang="ru-RU" sz="2400" dirty="0">
-              <a:cs typeface="Times New Roman" panose="02020603050405020304" pitchFamily="18" charset="0"/>
-            </a:endParaRPr>
-          </a:p>
-        </p:txBody>
-      </p:sp>
     </p:spTree>
     <p:extLst>
       <p:ext uri="{BB962C8B-B14F-4D97-AF65-F5344CB8AC3E}">
@@ -4764,6 +4811,53 @@
           </a:p>
         </p:txBody>
       </p:sp>
+      <p:pic>
+        <p:nvPicPr>
+          <p:cNvPr id="2050" name="Picture 2">
+            <a:extLst>
+              <a:ext uri="{FF2B5EF4-FFF2-40B4-BE49-F238E27FC236}">
+                <a16:creationId xmlns:a16="http://schemas.microsoft.com/office/drawing/2014/main" id="{B1FC456F-FB9C-0D4C-B758-6C576F83786E}"/>
+              </a:ext>
+            </a:extLst>
+          </p:cNvPr>
+          <p:cNvPicPr>
+            <a:picLocks noChangeAspect="1" noChangeArrowheads="1"/>
+          </p:cNvPicPr>
+          <p:nvPr/>
+        </p:nvPicPr>
+        <p:blipFill rotWithShape="1">
+          <a:blip r:embed="rId3">
+            <a:extLst>
+              <a:ext uri="{28A0092B-C50C-407E-A947-70E740481C1C}">
+                <a14:useLocalDpi xmlns:a14="http://schemas.microsoft.com/office/drawing/2010/main" val="0"/>
+              </a:ext>
+            </a:extLst>
+          </a:blip>
+          <a:srcRect t="1336"/>
+          <a:stretch>
+            <a:fillRect/>
+          </a:stretch>
+        </p:blipFill>
+        <p:spPr bwMode="auto">
+          <a:xfrm>
+            <a:off x="838200" y="1166698"/>
+            <a:ext cx="10381862" cy="4725468"/>
+          </a:xfrm>
+          <a:prstGeom prst="rect">
+            <a:avLst/>
+          </a:prstGeom>
+          <a:noFill/>
+          <a:extLst>
+            <a:ext uri="{909E8E84-426E-40DD-AFC4-6F175D3DCCD1}">
+              <a14:hiddenFill xmlns:a14="http://schemas.microsoft.com/office/drawing/2010/main">
+                <a:solidFill>
+                  <a:srgbClr val="FFFFFF"/>
+                </a:solidFill>
+              </a14:hiddenFill>
+            </a:ext>
+          </a:extLst>
+        </p:spPr>
+      </p:pic>
     </p:spTree>
   </p:cSld>
   <p:clrMapOvr>
@@ -4795,12 +4889,149 @@
           <a:chExt cx="0" cy="0"/>
         </a:xfrm>
       </p:grpSpPr>
+      <p:sp>
+        <p:nvSpPr>
+          <p:cNvPr id="2" name="Заголовок 1">
+            <a:extLst>
+              <a:ext uri="{FF2B5EF4-FFF2-40B4-BE49-F238E27FC236}">
+                <a16:creationId xmlns:a16="http://schemas.microsoft.com/office/drawing/2014/main" id="{146A6C04-60E0-8F1B-B2E2-BF543EAC0BD4}"/>
+              </a:ext>
+            </a:extLst>
+          </p:cNvPr>
+          <p:cNvSpPr>
+            <a:spLocks noGrp="1"/>
+          </p:cNvSpPr>
+          <p:nvPr>
+            <p:ph type="title"/>
+          </p:nvPr>
+        </p:nvSpPr>
+        <p:spPr>
+          <a:xfrm>
+            <a:off x="838200" y="0"/>
+            <a:ext cx="10515600" cy="1325563"/>
+          </a:xfrm>
+        </p:spPr>
+        <p:txBody>
+          <a:bodyPr/>
+          <a:lstStyle/>
+          <a:p>
+            <a:r>
+              <a:rPr lang="ru-RU" b="1" dirty="0">
+                <a:latin typeface="+mn-lt"/>
+              </a:rPr>
+              <a:t>Интерфейс продукта</a:t>
+            </a:r>
+          </a:p>
+        </p:txBody>
+      </p:sp>
+      <p:sp>
+        <p:nvSpPr>
+          <p:cNvPr id="3" name="Номер слайда 2">
+            <a:extLst>
+              <a:ext uri="{FF2B5EF4-FFF2-40B4-BE49-F238E27FC236}">
+                <a16:creationId xmlns:a16="http://schemas.microsoft.com/office/drawing/2014/main" id="{A91C5A47-5E91-A351-B430-CEC1DC470F2B}"/>
+              </a:ext>
+            </a:extLst>
+          </p:cNvPr>
+          <p:cNvSpPr>
+            <a:spLocks noGrp="1"/>
+          </p:cNvSpPr>
+          <p:nvPr>
+            <p:ph type="sldNum" sz="quarter" idx="12"/>
+          </p:nvPr>
+        </p:nvSpPr>
+        <p:spPr/>
+        <p:txBody>
+          <a:bodyPr/>
+          <a:lstStyle/>
+          <a:p>
+            <a:fld id="{C792C54E-EFF1-4B00-8652-01128ACE980F}" type="slidenum">
+              <a:rPr lang="ru-RU" smtClean="0"/>
+              <a:pPr/>
+              <a:t>13</a:t>
+            </a:fld>
+            <a:endParaRPr lang="ru-RU"/>
+          </a:p>
+        </p:txBody>
+      </p:sp>
+      <p:sp>
+        <p:nvSpPr>
+          <p:cNvPr id="4" name="Объект 6">
+            <a:extLst>
+              <a:ext uri="{FF2B5EF4-FFF2-40B4-BE49-F238E27FC236}">
+                <a16:creationId xmlns:a16="http://schemas.microsoft.com/office/drawing/2014/main" id="{2B1A34DB-2062-1014-1D0E-AFB8471D9F52}"/>
+              </a:ext>
+            </a:extLst>
+          </p:cNvPr>
+          <p:cNvSpPr>
+            <a:spLocks noGrp="1"/>
+          </p:cNvSpPr>
+          <p:nvPr>
+            <p:ph idx="1"/>
+          </p:nvPr>
+        </p:nvSpPr>
+        <p:spPr>
+          <a:xfrm>
+            <a:off x="2412076" y="5955464"/>
+            <a:ext cx="7367848" cy="558510"/>
+          </a:xfrm>
+        </p:spPr>
+        <p:txBody>
+          <a:bodyPr>
+            <a:normAutofit/>
+          </a:bodyPr>
+          <a:lstStyle/>
+          <a:p>
+            <a:pPr marL="0" indent="0">
+              <a:buNone/>
+            </a:pPr>
+            <a:r>
+              <a:rPr lang="ru-RU" sz="2400" dirty="0">
+                <a:cs typeface="Times New Roman" panose="02020603050405020304" pitchFamily="18" charset="0"/>
+              </a:rPr>
+              <a:t>Страница </a:t>
+            </a:r>
+            <a:r>
+              <a:rPr lang="en-US" sz="2400" dirty="0">
+                <a:cs typeface="Times New Roman" panose="02020603050405020304" pitchFamily="18" charset="0"/>
+              </a:rPr>
+              <a:t>“</a:t>
+            </a:r>
+            <a:r>
+              <a:rPr lang="ru-RU" sz="2400" dirty="0">
+                <a:cs typeface="Times New Roman" panose="02020603050405020304" pitchFamily="18" charset="0"/>
+              </a:rPr>
+              <a:t>Управление клонами</a:t>
+            </a:r>
+            <a:r>
+              <a:rPr lang="en-US" sz="2400" dirty="0">
+                <a:cs typeface="Times New Roman" panose="02020603050405020304" pitchFamily="18" charset="0"/>
+              </a:rPr>
+              <a:t>”</a:t>
+            </a:r>
+            <a:r>
+              <a:rPr lang="ru-RU" sz="2400" dirty="0">
+                <a:cs typeface="Times New Roman" panose="02020603050405020304" pitchFamily="18" charset="0"/>
+              </a:rPr>
+              <a:t>, окно создания клона</a:t>
+            </a:r>
+          </a:p>
+          <a:p>
+            <a:pPr marL="0" indent="0">
+              <a:buNone/>
+            </a:pPr>
+            <a:endParaRPr lang="ru-RU" sz="2400" dirty="0">
+              <a:cs typeface="Times New Roman" panose="02020603050405020304" pitchFamily="18" charset="0"/>
+            </a:endParaRPr>
+          </a:p>
+        </p:txBody>
+      </p:sp>
       <p:pic>
         <p:nvPicPr>
-          <p:cNvPr id="7172" name="Picture 4">
-            <a:extLst>
-              <a:ext uri="{FF2B5EF4-FFF2-40B4-BE49-F238E27FC236}">
-                <a16:creationId xmlns:a16="http://schemas.microsoft.com/office/drawing/2014/main" id="{8861A417-EDA8-CE6C-5501-C33C029097DC}"/>
+          <p:cNvPr id="1028" name="Picture 4">
+            <a:extLst>
+              <a:ext uri="{FF2B5EF4-FFF2-40B4-BE49-F238E27FC236}">
+                <a16:creationId xmlns:a16="http://schemas.microsoft.com/office/drawing/2014/main" id="{A3F535D4-7A74-2372-F1E8-BD8CAE26C5A8}"/>
               </a:ext>
             </a:extLst>
           </p:cNvPr>
@@ -4809,7 +5040,7 @@
           </p:cNvPicPr>
           <p:nvPr/>
         </p:nvPicPr>
-        <p:blipFill>
+        <p:blipFill rotWithShape="1">
           <a:blip r:embed="rId2">
             <a:extLst>
               <a:ext uri="{28A0092B-C50C-407E-A947-70E740481C1C}">
@@ -4817,15 +5048,15 @@
               </a:ext>
             </a:extLst>
           </a:blip>
-          <a:srcRect/>
+          <a:srcRect b="17377"/>
           <a:stretch>
             <a:fillRect/>
           </a:stretch>
         </p:blipFill>
         <p:spPr bwMode="auto">
           <a:xfrm>
-            <a:off x="838200" y="1314334"/>
-            <a:ext cx="9812691" cy="4540925"/>
+            <a:off x="440575" y="1229505"/>
+            <a:ext cx="10913225" cy="4518458"/>
           </a:xfrm>
           <a:prstGeom prst="rect">
             <a:avLst/>
@@ -4842,143 +5073,6 @@
           </a:extLst>
         </p:spPr>
       </p:pic>
-      <p:sp>
-        <p:nvSpPr>
-          <p:cNvPr id="2" name="Заголовок 1">
-            <a:extLst>
-              <a:ext uri="{FF2B5EF4-FFF2-40B4-BE49-F238E27FC236}">
-                <a16:creationId xmlns:a16="http://schemas.microsoft.com/office/drawing/2014/main" id="{146A6C04-60E0-8F1B-B2E2-BF543EAC0BD4}"/>
-              </a:ext>
-            </a:extLst>
-          </p:cNvPr>
-          <p:cNvSpPr>
-            <a:spLocks noGrp="1"/>
-          </p:cNvSpPr>
-          <p:nvPr>
-            <p:ph type="title"/>
-          </p:nvPr>
-        </p:nvSpPr>
-        <p:spPr>
-          <a:xfrm>
-            <a:off x="838200" y="0"/>
-            <a:ext cx="10515600" cy="1325563"/>
-          </a:xfrm>
-        </p:spPr>
-        <p:txBody>
-          <a:bodyPr/>
-          <a:lstStyle/>
-          <a:p>
-            <a:r>
-              <a:rPr lang="ru-RU" b="1" dirty="0">
-                <a:latin typeface="+mn-lt"/>
-              </a:rPr>
-              <a:t>Интерфейс продукта</a:t>
-            </a:r>
-          </a:p>
-        </p:txBody>
-      </p:sp>
-      <p:sp>
-        <p:nvSpPr>
-          <p:cNvPr id="3" name="Номер слайда 2">
-            <a:extLst>
-              <a:ext uri="{FF2B5EF4-FFF2-40B4-BE49-F238E27FC236}">
-                <a16:creationId xmlns:a16="http://schemas.microsoft.com/office/drawing/2014/main" id="{A91C5A47-5E91-A351-B430-CEC1DC470F2B}"/>
-              </a:ext>
-            </a:extLst>
-          </p:cNvPr>
-          <p:cNvSpPr>
-            <a:spLocks noGrp="1"/>
-          </p:cNvSpPr>
-          <p:nvPr>
-            <p:ph type="sldNum" sz="quarter" idx="12"/>
-          </p:nvPr>
-        </p:nvSpPr>
-        <p:spPr/>
-        <p:txBody>
-          <a:bodyPr/>
-          <a:lstStyle/>
-          <a:p>
-            <a:fld id="{C792C54E-EFF1-4B00-8652-01128ACE980F}" type="slidenum">
-              <a:rPr lang="ru-RU" smtClean="0"/>
-              <a:pPr/>
-              <a:t>13</a:t>
-            </a:fld>
-            <a:endParaRPr lang="ru-RU"/>
-          </a:p>
-        </p:txBody>
-      </p:sp>
-      <p:sp>
-        <p:nvSpPr>
-          <p:cNvPr id="4" name="Объект 6">
-            <a:extLst>
-              <a:ext uri="{FF2B5EF4-FFF2-40B4-BE49-F238E27FC236}">
-                <a16:creationId xmlns:a16="http://schemas.microsoft.com/office/drawing/2014/main" id="{2B1A34DB-2062-1014-1D0E-AFB8471D9F52}"/>
-              </a:ext>
-            </a:extLst>
-          </p:cNvPr>
-          <p:cNvSpPr>
-            <a:spLocks noGrp="1"/>
-          </p:cNvSpPr>
-          <p:nvPr>
-            <p:ph idx="1"/>
-          </p:nvPr>
-        </p:nvSpPr>
-        <p:spPr>
-          <a:xfrm>
-            <a:off x="2412076" y="5955464"/>
-            <a:ext cx="7367848" cy="558510"/>
-          </a:xfrm>
-        </p:spPr>
-        <p:txBody>
-          <a:bodyPr>
-            <a:normAutofit/>
-          </a:bodyPr>
-          <a:lstStyle/>
-          <a:p>
-            <a:pPr marL="0" indent="0">
-              <a:buNone/>
-            </a:pPr>
-            <a:r>
-              <a:rPr lang="ru-RU" sz="2400" dirty="0">
-                <a:cs typeface="Times New Roman" panose="02020603050405020304" pitchFamily="18" charset="0"/>
-              </a:rPr>
-              <a:t>Страница </a:t>
-            </a:r>
-            <a:r>
-              <a:rPr lang="en-US" sz="2400" dirty="0">
-                <a:cs typeface="Times New Roman" panose="02020603050405020304" pitchFamily="18" charset="0"/>
-              </a:rPr>
-              <a:t>“</a:t>
-            </a:r>
-            <a:r>
-              <a:rPr lang="ru-RU" sz="2400" dirty="0">
-                <a:cs typeface="Times New Roman" panose="02020603050405020304" pitchFamily="18" charset="0"/>
-              </a:rPr>
-              <a:t>Управление клонами</a:t>
-            </a:r>
-            <a:r>
-              <a:rPr lang="en-US" sz="2400" dirty="0">
-                <a:cs typeface="Times New Roman" panose="02020603050405020304" pitchFamily="18" charset="0"/>
-              </a:rPr>
-              <a:t>”</a:t>
-            </a:r>
-            <a:r>
-              <a:rPr lang="ru-RU" sz="2400" dirty="0">
-                <a:cs typeface="Times New Roman" panose="02020603050405020304" pitchFamily="18" charset="0"/>
-              </a:rPr>
-              <a:t>, окно создания клона</a:t>
-            </a:r>
-          </a:p>
-          <a:p>
-            <a:pPr marL="0" indent="0">
-              <a:buNone/>
-            </a:pPr>
-            <a:endParaRPr lang="ru-RU" sz="2400" dirty="0">
-              <a:cs typeface="Times New Roman" panose="02020603050405020304" pitchFamily="18" charset="0"/>
-            </a:endParaRPr>
-          </a:p>
-        </p:txBody>
-      </p:sp>
     </p:spTree>
     <p:extLst>
       <p:ext uri="{BB962C8B-B14F-4D97-AF65-F5344CB8AC3E}">
@@ -5413,6 +5507,53 @@
           </a:p>
         </p:txBody>
       </p:sp>
+      <p:pic>
+        <p:nvPicPr>
+          <p:cNvPr id="1026" name="Picture 2">
+            <a:extLst>
+              <a:ext uri="{FF2B5EF4-FFF2-40B4-BE49-F238E27FC236}">
+                <a16:creationId xmlns:a16="http://schemas.microsoft.com/office/drawing/2014/main" id="{213CFA8C-CA6A-5E10-09E2-CE5F51D219C5}"/>
+              </a:ext>
+            </a:extLst>
+          </p:cNvPr>
+          <p:cNvPicPr>
+            <a:picLocks noChangeAspect="1" noChangeArrowheads="1"/>
+          </p:cNvPicPr>
+          <p:nvPr/>
+        </p:nvPicPr>
+        <p:blipFill rotWithShape="1">
+          <a:blip r:embed="rId3">
+            <a:extLst>
+              <a:ext uri="{28A0092B-C50C-407E-A947-70E740481C1C}">
+                <a14:useLocalDpi xmlns:a14="http://schemas.microsoft.com/office/drawing/2010/main" val="0"/>
+              </a:ext>
+            </a:extLst>
+          </a:blip>
+          <a:srcRect t="1097"/>
+          <a:stretch>
+            <a:fillRect/>
+          </a:stretch>
+        </p:blipFill>
+        <p:spPr bwMode="auto">
+          <a:xfrm>
+            <a:off x="562242" y="1102128"/>
+            <a:ext cx="10392295" cy="4790038"/>
+          </a:xfrm>
+          <a:prstGeom prst="rect">
+            <a:avLst/>
+          </a:prstGeom>
+          <a:noFill/>
+          <a:extLst>
+            <a:ext uri="{909E8E84-426E-40DD-AFC4-6F175D3DCCD1}">
+              <a14:hiddenFill xmlns:a14="http://schemas.microsoft.com/office/drawing/2010/main">
+                <a:solidFill>
+                  <a:srgbClr val="FFFFFF"/>
+                </a:solidFill>
+              </a14:hiddenFill>
+            </a:ext>
+          </a:extLst>
+        </p:spPr>
+      </p:pic>
     </p:spTree>
     <p:extLst>
       <p:ext uri="{BB962C8B-B14F-4D97-AF65-F5344CB8AC3E}">
@@ -7332,8 +7473,8 @@
         </p:blipFill>
         <p:spPr>
           <a:xfrm>
-            <a:off x="121973" y="1325563"/>
-            <a:ext cx="10809263" cy="4919645"/>
+            <a:off x="107343" y="1072183"/>
+            <a:ext cx="11494565" cy="5231548"/>
           </a:xfrm>
           <a:prstGeom prst="rect">
             <a:avLst/>

--- a/Диплом/Презентация/Бородина_Анастасия_Владимировна_2207Д2_06.05.26.pptx
+++ b/Диплом/Презентация/Бородина_Анастасия_Владимировна_2207Д2_06.05.26.pptx
@@ -21,8 +21,8 @@
     <p:sldId id="271" r:id="rId12"/>
     <p:sldId id="263" r:id="rId13"/>
     <p:sldId id="270" r:id="rId14"/>
-    <p:sldId id="267" r:id="rId15"/>
-    <p:sldId id="268" r:id="rId16"/>
+    <p:sldId id="268" r:id="rId15"/>
+    <p:sldId id="267" r:id="rId16"/>
     <p:sldId id="259" r:id="rId17"/>
   </p:sldIdLst>
   <p:sldSz cx="12192000" cy="6858000"/>
@@ -224,7 +224,7 @@
             <a:fld id="{2CBAF322-1614-4B94-B6A1-B76658E349DC}" type="datetimeFigureOut">
               <a:rPr lang="ru-RU" smtClean="0"/>
               <a:pPr/>
-              <a:t>14.05.2026</a:t>
+              <a:t>18.05.2026</a:t>
             </a:fld>
             <a:endParaRPr lang="ru-RU"/>
           </a:p>
@@ -639,7 +639,7 @@
           <a:p>
             <a:fld id="{929F2640-2EF4-4A43-9842-276C25197E25}" type="datetime1">
               <a:rPr lang="ru-RU" smtClean="0"/>
-              <a:t>14.05.2026</a:t>
+              <a:t>18.05.2026</a:t>
             </a:fld>
             <a:endParaRPr lang="ru-RU"/>
           </a:p>
@@ -838,7 +838,7 @@
           <a:p>
             <a:fld id="{FA7AEEE2-DC8F-4C66-9038-4CB95A7529D0}" type="datetime1">
               <a:rPr lang="ru-RU" smtClean="0"/>
-              <a:t>14.05.2026</a:t>
+              <a:t>18.05.2026</a:t>
             </a:fld>
             <a:endParaRPr lang="ru-RU"/>
           </a:p>
@@ -1047,7 +1047,7 @@
           <a:p>
             <a:fld id="{E86C36E5-C478-443C-BAEF-26B63FBE0A6B}" type="datetime1">
               <a:rPr lang="ru-RU" smtClean="0"/>
-              <a:t>14.05.2026</a:t>
+              <a:t>18.05.2026</a:t>
             </a:fld>
             <a:endParaRPr lang="ru-RU"/>
           </a:p>
@@ -1246,7 +1246,7 @@
           <a:p>
             <a:fld id="{1D830A2B-E972-4650-9194-9F682251A062}" type="datetime1">
               <a:rPr lang="ru-RU" smtClean="0"/>
-              <a:t>14.05.2026</a:t>
+              <a:t>18.05.2026</a:t>
             </a:fld>
             <a:endParaRPr lang="ru-RU"/>
           </a:p>
@@ -1522,7 +1522,7 @@
           <a:p>
             <a:fld id="{73089D3F-9628-40A0-8CDF-BFC5BF8A512E}" type="datetime1">
               <a:rPr lang="ru-RU" smtClean="0"/>
-              <a:t>14.05.2026</a:t>
+              <a:t>18.05.2026</a:t>
             </a:fld>
             <a:endParaRPr lang="ru-RU"/>
           </a:p>
@@ -1788,7 +1788,7 @@
           <a:p>
             <a:fld id="{994FC618-F43D-4137-885A-9D660F20BABE}" type="datetime1">
               <a:rPr lang="ru-RU" smtClean="0"/>
-              <a:t>14.05.2026</a:t>
+              <a:t>18.05.2026</a:t>
             </a:fld>
             <a:endParaRPr lang="ru-RU"/>
           </a:p>
@@ -2201,7 +2201,7 @@
           <a:p>
             <a:fld id="{68F59E0F-81D3-46F2-A21F-80B324275C0B}" type="datetime1">
               <a:rPr lang="ru-RU" smtClean="0"/>
-              <a:t>14.05.2026</a:t>
+              <a:t>18.05.2026</a:t>
             </a:fld>
             <a:endParaRPr lang="ru-RU"/>
           </a:p>
@@ -2343,7 +2343,7 @@
           <a:p>
             <a:fld id="{CBDF851B-9994-4471-A95F-63C98C94C25C}" type="datetime1">
               <a:rPr lang="ru-RU" smtClean="0"/>
-              <a:t>14.05.2026</a:t>
+              <a:t>18.05.2026</a:t>
             </a:fld>
             <a:endParaRPr lang="ru-RU"/>
           </a:p>
@@ -2457,7 +2457,7 @@
           <a:p>
             <a:fld id="{FE9C0E54-4CC8-47B6-A2ED-519E308C3D5C}" type="datetime1">
               <a:rPr lang="ru-RU" smtClean="0"/>
-              <a:t>14.05.2026</a:t>
+              <a:t>18.05.2026</a:t>
             </a:fld>
             <a:endParaRPr lang="ru-RU"/>
           </a:p>
@@ -2769,7 +2769,7 @@
           <a:p>
             <a:fld id="{B148578A-6CC4-494D-9939-AE0BC863DCC9}" type="datetime1">
               <a:rPr lang="ru-RU" smtClean="0"/>
-              <a:t>14.05.2026</a:t>
+              <a:t>18.05.2026</a:t>
             </a:fld>
             <a:endParaRPr lang="ru-RU"/>
           </a:p>
@@ -3058,7 +3058,7 @@
           <a:p>
             <a:fld id="{0D930757-F38F-41AC-A030-FD2A4ED4502C}" type="datetime1">
               <a:rPr lang="ru-RU" smtClean="0"/>
-              <a:t>14.05.2026</a:t>
+              <a:t>18.05.2026</a:t>
             </a:fld>
             <a:endParaRPr lang="ru-RU"/>
           </a:p>
@@ -3300,7 +3300,7 @@
           <a:p>
             <a:fld id="{FDEF9CD6-0EBB-4035-B231-EA9AEF8C103A}" type="datetime1">
               <a:rPr lang="ru-RU" smtClean="0"/>
-              <a:t>14.05.2026</a:t>
+              <a:t>18.05.2026</a:t>
             </a:fld>
             <a:endParaRPr lang="ru-RU"/>
           </a:p>
@@ -3743,7 +3743,7 @@
         </p:spPr>
         <p:txBody>
           <a:bodyPr>
-            <a:normAutofit fontScale="90000"/>
+            <a:normAutofit/>
           </a:bodyPr>
           <a:lstStyle/>
           <a:p>
@@ -3761,27 +3761,10 @@
               </a:rPr>
               <a:t>MS SQL</a:t>
             </a:r>
-            <a:r>
-              <a:rPr lang="ru-RU" sz="3200" b="1" dirty="0">
-                <a:latin typeface="+mn-lt"/>
-                <a:cs typeface="Times New Roman" panose="02020603050405020304" pitchFamily="18" charset="0"/>
-              </a:rPr>
-              <a:t> </a:t>
-            </a:r>
-            <a:r>
-              <a:rPr lang="en-US" sz="3200" b="1" dirty="0">
-                <a:latin typeface="+mn-lt"/>
-                <a:cs typeface="Times New Roman" panose="02020603050405020304" pitchFamily="18" charset="0"/>
-              </a:rPr>
-              <a:t>c</a:t>
-            </a:r>
-            <a:r>
-              <a:rPr lang="ru-RU" sz="3200" b="1" dirty="0">
-                <a:latin typeface="+mn-lt"/>
-                <a:cs typeface="Times New Roman" panose="02020603050405020304" pitchFamily="18" charset="0"/>
-              </a:rPr>
-              <a:t> возможностью управления клонами и мониторингом</a:t>
-            </a:r>
+            <a:endParaRPr lang="ru-RU" sz="3200" b="1" dirty="0">
+              <a:latin typeface="+mn-lt"/>
+              <a:cs typeface="Times New Roman" panose="02020603050405020304" pitchFamily="18" charset="0"/>
+            </a:endParaRPr>
           </a:p>
         </p:txBody>
       </p:sp>
@@ -5094,6 +5077,270 @@
         <p:cNvPr id="1" name="">
           <a:extLst>
             <a:ext uri="{FF2B5EF4-FFF2-40B4-BE49-F238E27FC236}">
+              <a16:creationId xmlns:a16="http://schemas.microsoft.com/office/drawing/2014/main" id="{4C6DDA3E-1196-0231-A35A-F9405FE0179E}"/>
+            </a:ext>
+          </a:extLst>
+        </p:cNvPr>
+        <p:cNvGrpSpPr/>
+        <p:nvPr/>
+      </p:nvGrpSpPr>
+      <p:grpSpPr>
+        <a:xfrm>
+          <a:off x="0" y="0"/>
+          <a:ext cx="0" cy="0"/>
+          <a:chOff x="0" y="0"/>
+          <a:chExt cx="0" cy="0"/>
+        </a:xfrm>
+      </p:grpSpPr>
+      <p:pic>
+        <p:nvPicPr>
+          <p:cNvPr id="5124" name="Picture 4">
+            <a:extLst>
+              <a:ext uri="{FF2B5EF4-FFF2-40B4-BE49-F238E27FC236}">
+                <a16:creationId xmlns:a16="http://schemas.microsoft.com/office/drawing/2014/main" id="{7E9213FE-D586-4D83-B3BF-8993F7EFE48E}"/>
+              </a:ext>
+            </a:extLst>
+          </p:cNvPr>
+          <p:cNvPicPr>
+            <a:picLocks noChangeAspect="1" noChangeArrowheads="1"/>
+          </p:cNvPicPr>
+          <p:nvPr/>
+        </p:nvPicPr>
+        <p:blipFill>
+          <a:blip r:embed="rId2">
+            <a:extLst>
+              <a:ext uri="{28A0092B-C50C-407E-A947-70E740481C1C}">
+                <a14:useLocalDpi xmlns:a14="http://schemas.microsoft.com/office/drawing/2010/main" val="0"/>
+              </a:ext>
+            </a:extLst>
+          </a:blip>
+          <a:srcRect/>
+          <a:stretch>
+            <a:fillRect/>
+          </a:stretch>
+        </p:blipFill>
+        <p:spPr bwMode="auto">
+          <a:xfrm>
+            <a:off x="838200" y="1314335"/>
+            <a:ext cx="9840380" cy="4505049"/>
+          </a:xfrm>
+          <a:prstGeom prst="rect">
+            <a:avLst/>
+          </a:prstGeom>
+          <a:noFill/>
+          <a:extLst>
+            <a:ext uri="{909E8E84-426E-40DD-AFC4-6F175D3DCCD1}">
+              <a14:hiddenFill xmlns:a14="http://schemas.microsoft.com/office/drawing/2010/main">
+                <a:solidFill>
+                  <a:srgbClr val="FFFFFF"/>
+                </a:solidFill>
+              </a14:hiddenFill>
+            </a:ext>
+          </a:extLst>
+        </p:spPr>
+      </p:pic>
+      <p:sp>
+        <p:nvSpPr>
+          <p:cNvPr id="2" name="Заголовок 1">
+            <a:extLst>
+              <a:ext uri="{FF2B5EF4-FFF2-40B4-BE49-F238E27FC236}">
+                <a16:creationId xmlns:a16="http://schemas.microsoft.com/office/drawing/2014/main" id="{89BB1FEA-758D-959A-35F0-627188BD7566}"/>
+              </a:ext>
+            </a:extLst>
+          </p:cNvPr>
+          <p:cNvSpPr>
+            <a:spLocks noGrp="1"/>
+          </p:cNvSpPr>
+          <p:nvPr>
+            <p:ph type="title"/>
+          </p:nvPr>
+        </p:nvSpPr>
+        <p:spPr>
+          <a:xfrm>
+            <a:off x="838200" y="0"/>
+            <a:ext cx="10515600" cy="1325563"/>
+          </a:xfrm>
+        </p:spPr>
+        <p:txBody>
+          <a:bodyPr/>
+          <a:lstStyle/>
+          <a:p>
+            <a:r>
+              <a:rPr lang="ru-RU" b="1" dirty="0">
+                <a:latin typeface="+mn-lt"/>
+              </a:rPr>
+              <a:t>Интерфейс продукта</a:t>
+            </a:r>
+          </a:p>
+        </p:txBody>
+      </p:sp>
+      <p:sp>
+        <p:nvSpPr>
+          <p:cNvPr id="3" name="Номер слайда 2">
+            <a:extLst>
+              <a:ext uri="{FF2B5EF4-FFF2-40B4-BE49-F238E27FC236}">
+                <a16:creationId xmlns:a16="http://schemas.microsoft.com/office/drawing/2014/main" id="{ED4C32D0-FD32-F810-B123-2B4A0015A795}"/>
+              </a:ext>
+            </a:extLst>
+          </p:cNvPr>
+          <p:cNvSpPr>
+            <a:spLocks noGrp="1"/>
+          </p:cNvSpPr>
+          <p:nvPr>
+            <p:ph type="sldNum" sz="quarter" idx="12"/>
+          </p:nvPr>
+        </p:nvSpPr>
+        <p:spPr/>
+        <p:txBody>
+          <a:bodyPr/>
+          <a:lstStyle/>
+          <a:p>
+            <a:fld id="{C792C54E-EFF1-4B00-8652-01128ACE980F}" type="slidenum">
+              <a:rPr lang="ru-RU" smtClean="0"/>
+              <a:pPr/>
+              <a:t>14</a:t>
+            </a:fld>
+            <a:endParaRPr lang="ru-RU"/>
+          </a:p>
+        </p:txBody>
+      </p:sp>
+      <p:sp>
+        <p:nvSpPr>
+          <p:cNvPr id="4" name="Объект 6">
+            <a:extLst>
+              <a:ext uri="{FF2B5EF4-FFF2-40B4-BE49-F238E27FC236}">
+                <a16:creationId xmlns:a16="http://schemas.microsoft.com/office/drawing/2014/main" id="{E99DCA30-8A31-90B6-9ED7-5CD3425A8E7D}"/>
+              </a:ext>
+            </a:extLst>
+          </p:cNvPr>
+          <p:cNvSpPr>
+            <a:spLocks noGrp="1"/>
+          </p:cNvSpPr>
+          <p:nvPr>
+            <p:ph idx="1"/>
+          </p:nvPr>
+        </p:nvSpPr>
+        <p:spPr>
+          <a:xfrm>
+            <a:off x="3846022" y="5892166"/>
+            <a:ext cx="4764578" cy="391402"/>
+          </a:xfrm>
+        </p:spPr>
+        <p:txBody>
+          <a:bodyPr>
+            <a:normAutofit lnSpcReduction="10000"/>
+          </a:bodyPr>
+          <a:lstStyle/>
+          <a:p>
+            <a:pPr marL="0" indent="0">
+              <a:buNone/>
+            </a:pPr>
+            <a:r>
+              <a:rPr lang="ru-RU" sz="2400" dirty="0">
+                <a:cs typeface="Times New Roman" panose="02020603050405020304" pitchFamily="18" charset="0"/>
+              </a:rPr>
+              <a:t>Страница </a:t>
+            </a:r>
+            <a:r>
+              <a:rPr lang="en-US" sz="2400" dirty="0">
+                <a:cs typeface="Times New Roman" panose="02020603050405020304" pitchFamily="18" charset="0"/>
+              </a:rPr>
+              <a:t>“</a:t>
+            </a:r>
+            <a:r>
+              <a:rPr lang="ru-RU" sz="2400" dirty="0">
+                <a:cs typeface="Times New Roman" panose="02020603050405020304" pitchFamily="18" charset="0"/>
+              </a:rPr>
+              <a:t>Мониторинг</a:t>
+            </a:r>
+            <a:r>
+              <a:rPr lang="en-US" sz="2400" dirty="0">
+                <a:cs typeface="Times New Roman" panose="02020603050405020304" pitchFamily="18" charset="0"/>
+              </a:rPr>
+              <a:t>”</a:t>
+            </a:r>
+            <a:endParaRPr lang="ru-RU" sz="2400" dirty="0">
+              <a:cs typeface="Times New Roman" panose="02020603050405020304" pitchFamily="18" charset="0"/>
+            </a:endParaRPr>
+          </a:p>
+          <a:p>
+            <a:pPr marL="0" indent="0">
+              <a:buNone/>
+            </a:pPr>
+            <a:endParaRPr lang="ru-RU" sz="2400" dirty="0">
+              <a:cs typeface="Times New Roman" panose="02020603050405020304" pitchFamily="18" charset="0"/>
+            </a:endParaRPr>
+          </a:p>
+        </p:txBody>
+      </p:sp>
+      <p:pic>
+        <p:nvPicPr>
+          <p:cNvPr id="1026" name="Picture 2">
+            <a:extLst>
+              <a:ext uri="{FF2B5EF4-FFF2-40B4-BE49-F238E27FC236}">
+                <a16:creationId xmlns:a16="http://schemas.microsoft.com/office/drawing/2014/main" id="{213CFA8C-CA6A-5E10-09E2-CE5F51D219C5}"/>
+              </a:ext>
+            </a:extLst>
+          </p:cNvPr>
+          <p:cNvPicPr>
+            <a:picLocks noChangeAspect="1" noChangeArrowheads="1"/>
+          </p:cNvPicPr>
+          <p:nvPr/>
+        </p:nvPicPr>
+        <p:blipFill rotWithShape="1">
+          <a:blip r:embed="rId3">
+            <a:extLst>
+              <a:ext uri="{28A0092B-C50C-407E-A947-70E740481C1C}">
+                <a14:useLocalDpi xmlns:a14="http://schemas.microsoft.com/office/drawing/2010/main" val="0"/>
+              </a:ext>
+            </a:extLst>
+          </a:blip>
+          <a:srcRect t="1097"/>
+          <a:stretch>
+            <a:fillRect/>
+          </a:stretch>
+        </p:blipFill>
+        <p:spPr bwMode="auto">
+          <a:xfrm>
+            <a:off x="562242" y="1102128"/>
+            <a:ext cx="10392295" cy="4790038"/>
+          </a:xfrm>
+          <a:prstGeom prst="rect">
+            <a:avLst/>
+          </a:prstGeom>
+          <a:noFill/>
+          <a:extLst>
+            <a:ext uri="{909E8E84-426E-40DD-AFC4-6F175D3DCCD1}">
+              <a14:hiddenFill xmlns:a14="http://schemas.microsoft.com/office/drawing/2010/main">
+                <a:solidFill>
+                  <a:srgbClr val="FFFFFF"/>
+                </a:solidFill>
+              </a14:hiddenFill>
+            </a:ext>
+          </a:extLst>
+        </p:spPr>
+      </p:pic>
+    </p:spTree>
+    <p:extLst>
+      <p:ext uri="{BB962C8B-B14F-4D97-AF65-F5344CB8AC3E}">
+        <p14:creationId xmlns:p14="http://schemas.microsoft.com/office/powerpoint/2010/main" val="2955178058"/>
+      </p:ext>
+    </p:extLst>
+  </p:cSld>
+  <p:clrMapOvr>
+    <a:masterClrMapping/>
+  </p:clrMapOvr>
+</p:sld>
+</file>
+
+<file path=ppt/slides/slide15.xml><?xml version="1.0" encoding="utf-8"?>
+<p:sld xmlns:a="http://schemas.openxmlformats.org/drawingml/2006/main" xmlns:r="http://schemas.openxmlformats.org/officeDocument/2006/relationships" xmlns:p="http://schemas.openxmlformats.org/presentationml/2006/main">
+  <p:cSld>
+    <p:spTree>
+      <p:nvGrpSpPr>
+        <p:cNvPr id="1" name="">
+          <a:extLst>
+            <a:ext uri="{FF2B5EF4-FFF2-40B4-BE49-F238E27FC236}">
               <a16:creationId xmlns:a16="http://schemas.microsoft.com/office/drawing/2014/main" id="{DB3483B1-6845-5896-B989-92013FD88BAC}"/>
             </a:ext>
           </a:extLst>
@@ -5215,7 +5462,7 @@
             <a:fld id="{C792C54E-EFF1-4B00-8652-01128ACE980F}" type="slidenum">
               <a:rPr lang="ru-RU" smtClean="0"/>
               <a:pPr/>
-              <a:t>14</a:t>
+              <a:t>15</a:t>
             </a:fld>
             <a:endParaRPr lang="ru-RU"/>
           </a:p>
@@ -5294,270 +5541,6 @@
     <p:extLst>
       <p:ext uri="{BB962C8B-B14F-4D97-AF65-F5344CB8AC3E}">
         <p14:creationId xmlns:p14="http://schemas.microsoft.com/office/powerpoint/2010/main" val="3566628589"/>
-      </p:ext>
-    </p:extLst>
-  </p:cSld>
-  <p:clrMapOvr>
-    <a:masterClrMapping/>
-  </p:clrMapOvr>
-</p:sld>
-</file>
-
-<file path=ppt/slides/slide15.xml><?xml version="1.0" encoding="utf-8"?>
-<p:sld xmlns:a="http://schemas.openxmlformats.org/drawingml/2006/main" xmlns:r="http://schemas.openxmlformats.org/officeDocument/2006/relationships" xmlns:p="http://schemas.openxmlformats.org/presentationml/2006/main">
-  <p:cSld>
-    <p:spTree>
-      <p:nvGrpSpPr>
-        <p:cNvPr id="1" name="">
-          <a:extLst>
-            <a:ext uri="{FF2B5EF4-FFF2-40B4-BE49-F238E27FC236}">
-              <a16:creationId xmlns:a16="http://schemas.microsoft.com/office/drawing/2014/main" id="{4C6DDA3E-1196-0231-A35A-F9405FE0179E}"/>
-            </a:ext>
-          </a:extLst>
-        </p:cNvPr>
-        <p:cNvGrpSpPr/>
-        <p:nvPr/>
-      </p:nvGrpSpPr>
-      <p:grpSpPr>
-        <a:xfrm>
-          <a:off x="0" y="0"/>
-          <a:ext cx="0" cy="0"/>
-          <a:chOff x="0" y="0"/>
-          <a:chExt cx="0" cy="0"/>
-        </a:xfrm>
-      </p:grpSpPr>
-      <p:pic>
-        <p:nvPicPr>
-          <p:cNvPr id="5124" name="Picture 4">
-            <a:extLst>
-              <a:ext uri="{FF2B5EF4-FFF2-40B4-BE49-F238E27FC236}">
-                <a16:creationId xmlns:a16="http://schemas.microsoft.com/office/drawing/2014/main" id="{7E9213FE-D586-4D83-B3BF-8993F7EFE48E}"/>
-              </a:ext>
-            </a:extLst>
-          </p:cNvPr>
-          <p:cNvPicPr>
-            <a:picLocks noChangeAspect="1" noChangeArrowheads="1"/>
-          </p:cNvPicPr>
-          <p:nvPr/>
-        </p:nvPicPr>
-        <p:blipFill>
-          <a:blip r:embed="rId2">
-            <a:extLst>
-              <a:ext uri="{28A0092B-C50C-407E-A947-70E740481C1C}">
-                <a14:useLocalDpi xmlns:a14="http://schemas.microsoft.com/office/drawing/2010/main" val="0"/>
-              </a:ext>
-            </a:extLst>
-          </a:blip>
-          <a:srcRect/>
-          <a:stretch>
-            <a:fillRect/>
-          </a:stretch>
-        </p:blipFill>
-        <p:spPr bwMode="auto">
-          <a:xfrm>
-            <a:off x="838200" y="1314335"/>
-            <a:ext cx="9840380" cy="4505049"/>
-          </a:xfrm>
-          <a:prstGeom prst="rect">
-            <a:avLst/>
-          </a:prstGeom>
-          <a:noFill/>
-          <a:extLst>
-            <a:ext uri="{909E8E84-426E-40DD-AFC4-6F175D3DCCD1}">
-              <a14:hiddenFill xmlns:a14="http://schemas.microsoft.com/office/drawing/2010/main">
-                <a:solidFill>
-                  <a:srgbClr val="FFFFFF"/>
-                </a:solidFill>
-              </a14:hiddenFill>
-            </a:ext>
-          </a:extLst>
-        </p:spPr>
-      </p:pic>
-      <p:sp>
-        <p:nvSpPr>
-          <p:cNvPr id="2" name="Заголовок 1">
-            <a:extLst>
-              <a:ext uri="{FF2B5EF4-FFF2-40B4-BE49-F238E27FC236}">
-                <a16:creationId xmlns:a16="http://schemas.microsoft.com/office/drawing/2014/main" id="{89BB1FEA-758D-959A-35F0-627188BD7566}"/>
-              </a:ext>
-            </a:extLst>
-          </p:cNvPr>
-          <p:cNvSpPr>
-            <a:spLocks noGrp="1"/>
-          </p:cNvSpPr>
-          <p:nvPr>
-            <p:ph type="title"/>
-          </p:nvPr>
-        </p:nvSpPr>
-        <p:spPr>
-          <a:xfrm>
-            <a:off x="838200" y="0"/>
-            <a:ext cx="10515600" cy="1325563"/>
-          </a:xfrm>
-        </p:spPr>
-        <p:txBody>
-          <a:bodyPr/>
-          <a:lstStyle/>
-          <a:p>
-            <a:r>
-              <a:rPr lang="ru-RU" b="1" dirty="0">
-                <a:latin typeface="+mn-lt"/>
-              </a:rPr>
-              <a:t>Интерфейс продукта</a:t>
-            </a:r>
-          </a:p>
-        </p:txBody>
-      </p:sp>
-      <p:sp>
-        <p:nvSpPr>
-          <p:cNvPr id="3" name="Номер слайда 2">
-            <a:extLst>
-              <a:ext uri="{FF2B5EF4-FFF2-40B4-BE49-F238E27FC236}">
-                <a16:creationId xmlns:a16="http://schemas.microsoft.com/office/drawing/2014/main" id="{ED4C32D0-FD32-F810-B123-2B4A0015A795}"/>
-              </a:ext>
-            </a:extLst>
-          </p:cNvPr>
-          <p:cNvSpPr>
-            <a:spLocks noGrp="1"/>
-          </p:cNvSpPr>
-          <p:nvPr>
-            <p:ph type="sldNum" sz="quarter" idx="12"/>
-          </p:nvPr>
-        </p:nvSpPr>
-        <p:spPr/>
-        <p:txBody>
-          <a:bodyPr/>
-          <a:lstStyle/>
-          <a:p>
-            <a:fld id="{C792C54E-EFF1-4B00-8652-01128ACE980F}" type="slidenum">
-              <a:rPr lang="ru-RU" smtClean="0"/>
-              <a:pPr/>
-              <a:t>15</a:t>
-            </a:fld>
-            <a:endParaRPr lang="ru-RU"/>
-          </a:p>
-        </p:txBody>
-      </p:sp>
-      <p:sp>
-        <p:nvSpPr>
-          <p:cNvPr id="4" name="Объект 6">
-            <a:extLst>
-              <a:ext uri="{FF2B5EF4-FFF2-40B4-BE49-F238E27FC236}">
-                <a16:creationId xmlns:a16="http://schemas.microsoft.com/office/drawing/2014/main" id="{E99DCA30-8A31-90B6-9ED7-5CD3425A8E7D}"/>
-              </a:ext>
-            </a:extLst>
-          </p:cNvPr>
-          <p:cNvSpPr>
-            <a:spLocks noGrp="1"/>
-          </p:cNvSpPr>
-          <p:nvPr>
-            <p:ph idx="1"/>
-          </p:nvPr>
-        </p:nvSpPr>
-        <p:spPr>
-          <a:xfrm>
-            <a:off x="3846022" y="5892166"/>
-            <a:ext cx="4764578" cy="391402"/>
-          </a:xfrm>
-        </p:spPr>
-        <p:txBody>
-          <a:bodyPr>
-            <a:normAutofit lnSpcReduction="10000"/>
-          </a:bodyPr>
-          <a:lstStyle/>
-          <a:p>
-            <a:pPr marL="0" indent="0">
-              <a:buNone/>
-            </a:pPr>
-            <a:r>
-              <a:rPr lang="ru-RU" sz="2400" dirty="0">
-                <a:cs typeface="Times New Roman" panose="02020603050405020304" pitchFamily="18" charset="0"/>
-              </a:rPr>
-              <a:t>Страница </a:t>
-            </a:r>
-            <a:r>
-              <a:rPr lang="en-US" sz="2400" dirty="0">
-                <a:cs typeface="Times New Roman" panose="02020603050405020304" pitchFamily="18" charset="0"/>
-              </a:rPr>
-              <a:t>“</a:t>
-            </a:r>
-            <a:r>
-              <a:rPr lang="ru-RU" sz="2400" dirty="0">
-                <a:cs typeface="Times New Roman" panose="02020603050405020304" pitchFamily="18" charset="0"/>
-              </a:rPr>
-              <a:t>Мониторинг</a:t>
-            </a:r>
-            <a:r>
-              <a:rPr lang="en-US" sz="2400" dirty="0">
-                <a:cs typeface="Times New Roman" panose="02020603050405020304" pitchFamily="18" charset="0"/>
-              </a:rPr>
-              <a:t>”</a:t>
-            </a:r>
-            <a:endParaRPr lang="ru-RU" sz="2400" dirty="0">
-              <a:cs typeface="Times New Roman" panose="02020603050405020304" pitchFamily="18" charset="0"/>
-            </a:endParaRPr>
-          </a:p>
-          <a:p>
-            <a:pPr marL="0" indent="0">
-              <a:buNone/>
-            </a:pPr>
-            <a:endParaRPr lang="ru-RU" sz="2400" dirty="0">
-              <a:cs typeface="Times New Roman" panose="02020603050405020304" pitchFamily="18" charset="0"/>
-            </a:endParaRPr>
-          </a:p>
-        </p:txBody>
-      </p:sp>
-      <p:pic>
-        <p:nvPicPr>
-          <p:cNvPr id="1026" name="Picture 2">
-            <a:extLst>
-              <a:ext uri="{FF2B5EF4-FFF2-40B4-BE49-F238E27FC236}">
-                <a16:creationId xmlns:a16="http://schemas.microsoft.com/office/drawing/2014/main" id="{213CFA8C-CA6A-5E10-09E2-CE5F51D219C5}"/>
-              </a:ext>
-            </a:extLst>
-          </p:cNvPr>
-          <p:cNvPicPr>
-            <a:picLocks noChangeAspect="1" noChangeArrowheads="1"/>
-          </p:cNvPicPr>
-          <p:nvPr/>
-        </p:nvPicPr>
-        <p:blipFill rotWithShape="1">
-          <a:blip r:embed="rId3">
-            <a:extLst>
-              <a:ext uri="{28A0092B-C50C-407E-A947-70E740481C1C}">
-                <a14:useLocalDpi xmlns:a14="http://schemas.microsoft.com/office/drawing/2010/main" val="0"/>
-              </a:ext>
-            </a:extLst>
-          </a:blip>
-          <a:srcRect t="1097"/>
-          <a:stretch>
-            <a:fillRect/>
-          </a:stretch>
-        </p:blipFill>
-        <p:spPr bwMode="auto">
-          <a:xfrm>
-            <a:off x="562242" y="1102128"/>
-            <a:ext cx="10392295" cy="4790038"/>
-          </a:xfrm>
-          <a:prstGeom prst="rect">
-            <a:avLst/>
-          </a:prstGeom>
-          <a:noFill/>
-          <a:extLst>
-            <a:ext uri="{909E8E84-426E-40DD-AFC4-6F175D3DCCD1}">
-              <a14:hiddenFill xmlns:a14="http://schemas.microsoft.com/office/drawing/2010/main">
-                <a:solidFill>
-                  <a:srgbClr val="FFFFFF"/>
-                </a:solidFill>
-              </a14:hiddenFill>
-            </a:ext>
-          </a:extLst>
-        </p:spPr>
-      </p:pic>
-    </p:spTree>
-    <p:extLst>
-      <p:ext uri="{BB962C8B-B14F-4D97-AF65-F5344CB8AC3E}">
-        <p14:creationId xmlns:p14="http://schemas.microsoft.com/office/powerpoint/2010/main" val="2955178058"/>
       </p:ext>
     </p:extLst>
   </p:cSld>
@@ -5660,7 +5643,7 @@
                 </a:solidFill>
                 <a:ea typeface="Cambria" panose="02040503050406030204" pitchFamily="18" charset="0"/>
               </a:rPr>
-              <a:t>В ходе реализации поставленной цели были выполнены следующие задачи:</a:t>
+              <a:t>В рамках разработки программного средства были выполнен следующие задачи:</a:t>
             </a:r>
           </a:p>
           <a:p>
@@ -5676,7 +5659,7 @@
                 </a:solidFill>
                 <a:ea typeface="Cambria" panose="02040503050406030204" pitchFamily="18" charset="0"/>
               </a:rPr>
-              <a:t>Выявлены ключевые потребности, которые должен покрывать продукт и разработано ТЗ.</a:t>
+              <a:t>Разработано техническое задание, согласно ключевым потребностям заказчика.</a:t>
             </a:r>
           </a:p>
           <a:p>
@@ -5692,7 +5675,7 @@
                 </a:solidFill>
                 <a:ea typeface="Cambria" panose="02040503050406030204" pitchFamily="18" charset="0"/>
               </a:rPr>
-              <a:t>Разработан интерфейса веб-клиента, согласно представленному макету.</a:t>
+              <a:t>Разработан клиентская часть продукта.</a:t>
             </a:r>
           </a:p>
           <a:p>
@@ -5748,7 +5731,7 @@
                 </a:solidFill>
                 <a:ea typeface="Cambria" panose="02040503050406030204" pitchFamily="18" charset="0"/>
               </a:rPr>
-              <a:t>Разработанное решение находится в процессе тестирования на стороне заказчика.</a:t>
+              <a:t>Разработанное программное средство принято заказчиком в полном объёме и находится в процессе тестирования на его стороне.</a:t>
             </a:r>
           </a:p>
           <a:p>
@@ -5853,6 +5836,37 @@
           <a:chExt cx="0" cy="0"/>
         </a:xfrm>
       </p:grpSpPr>
+      <p:pic>
+        <p:nvPicPr>
+          <p:cNvPr id="15" name="Рисунок 14">
+            <a:extLst>
+              <a:ext uri="{FF2B5EF4-FFF2-40B4-BE49-F238E27FC236}">
+                <a16:creationId xmlns:a16="http://schemas.microsoft.com/office/drawing/2014/main" id="{7588CFED-C0B4-C3CE-360B-2510B285688B}"/>
+              </a:ext>
+            </a:extLst>
+          </p:cNvPr>
+          <p:cNvPicPr>
+            <a:picLocks noChangeAspect="1"/>
+          </p:cNvPicPr>
+          <p:nvPr/>
+        </p:nvPicPr>
+        <p:blipFill>
+          <a:blip r:embed="rId2"/>
+          <a:srcRect t="8923" r="59708" b="63355"/>
+          <a:stretch>
+            <a:fillRect/>
+          </a:stretch>
+        </p:blipFill>
+        <p:spPr>
+          <a:xfrm>
+            <a:off x="698269" y="1736032"/>
+            <a:ext cx="10133768" cy="3804169"/>
+          </a:xfrm>
+          <a:prstGeom prst="rect">
+            <a:avLst/>
+          </a:prstGeom>
+        </p:spPr>
+      </p:pic>
       <p:sp>
         <p:nvSpPr>
           <p:cNvPr id="2" name="Заголовок 1">
@@ -5922,7 +5936,7 @@
             </a:pPr>
             <a:r>
               <a:rPr lang="ru-RU" sz="2400" dirty="0"/>
-              <a:t>Программное средство разработано по заказу компании ООО «БАЙТ» («Автотрейд») для внутреннего использования. </a:t>
+              <a:t>Программное средство разработано по заказу компании ООО «БАЙТ» («Автотрейд»). </a:t>
             </a:r>
             <a:br>
               <a:rPr lang="ru-RU" sz="2400" dirty="0"/>
@@ -5933,53 +5947,6 @@
           </a:p>
         </p:txBody>
       </p:sp>
-      <p:pic>
-        <p:nvPicPr>
-          <p:cNvPr id="5" name="Picture 6" descr="Microsoft Sql Server Logo Png">
-            <a:extLst>
-              <a:ext uri="{FF2B5EF4-FFF2-40B4-BE49-F238E27FC236}">
-                <a16:creationId xmlns:a16="http://schemas.microsoft.com/office/drawing/2014/main" id="{FD2A3D73-1BDB-492A-0A85-89E74B48BE4E}"/>
-              </a:ext>
-            </a:extLst>
-          </p:cNvPr>
-          <p:cNvPicPr>
-            <a:picLocks noChangeAspect="1" noChangeArrowheads="1"/>
-          </p:cNvPicPr>
-          <p:nvPr/>
-        </p:nvPicPr>
-        <p:blipFill>
-          <a:blip r:embed="rId2">
-            <a:extLst>
-              <a:ext uri="{28A0092B-C50C-407E-A947-70E740481C1C}">
-                <a14:useLocalDpi xmlns:a14="http://schemas.microsoft.com/office/drawing/2010/main" val="0"/>
-              </a:ext>
-            </a:extLst>
-          </a:blip>
-          <a:srcRect/>
-          <a:stretch>
-            <a:fillRect/>
-          </a:stretch>
-        </p:blipFill>
-        <p:spPr bwMode="auto">
-          <a:xfrm>
-            <a:off x="6463323" y="4219891"/>
-            <a:ext cx="2083911" cy="1684597"/>
-          </a:xfrm>
-          <a:prstGeom prst="rect">
-            <a:avLst/>
-          </a:prstGeom>
-          <a:noFill/>
-          <a:extLst>
-            <a:ext uri="{909E8E84-426E-40DD-AFC4-6F175D3DCCD1}">
-              <a14:hiddenFill xmlns:a14="http://schemas.microsoft.com/office/drawing/2010/main">
-                <a:solidFill>
-                  <a:srgbClr val="FFFFFF"/>
-                </a:solidFill>
-              </a14:hiddenFill>
-            </a:ext>
-          </a:extLst>
-        </p:spPr>
-      </p:pic>
       <p:sp>
         <p:nvSpPr>
           <p:cNvPr id="3" name="Номер слайда 2">
@@ -6205,79 +6172,38 @@
             <a:pPr marL="0" indent="0">
               <a:buNone/>
             </a:pPr>
-            <a:r>
-              <a:rPr lang="ru-RU" sz="2400" dirty="0"/>
-              <a:t>На этапах разработки и тестирования возникает потребность в изолированных копиях рабочих баз. Ручное создание копий для больших объёмов данных может занимать несколько часов. </a:t>
-            </a:r>
-            <a:br>
-              <a:rPr lang="ru-RU" sz="2400" dirty="0"/>
-            </a:br>
-            <a:r>
-              <a:rPr lang="ru-RU" sz="2400" dirty="0"/>
-              <a:t>Данное решение автоматизирует процесс клонирования, мгновенно разворачивая изолированные копии баз и предоставляя все инструменты управления в едином веб-интерфейсе.</a:t>
-            </a:r>
             <a:endParaRPr lang="ru-RU" sz="2400" dirty="0">
               <a:cs typeface="Times New Roman" panose="02020603050405020304" pitchFamily="18" charset="0"/>
             </a:endParaRPr>
           </a:p>
         </p:txBody>
       </p:sp>
-      <p:pic>
-        <p:nvPicPr>
-          <p:cNvPr id="10" name="Рисунок 9">
-            <a:extLst>
-              <a:ext uri="{FF2B5EF4-FFF2-40B4-BE49-F238E27FC236}">
-                <a16:creationId xmlns:a16="http://schemas.microsoft.com/office/drawing/2014/main" id="{FF44A41A-CD71-77CE-DD77-0B03E093C409}"/>
-              </a:ext>
-            </a:extLst>
-          </p:cNvPr>
-          <p:cNvPicPr>
-            <a:picLocks noChangeAspect="1"/>
-          </p:cNvPicPr>
+      <p:sp>
+        <p:nvSpPr>
+          <p:cNvPr id="12" name="Заголовок 1">
+            <a:extLst>
+              <a:ext uri="{FF2B5EF4-FFF2-40B4-BE49-F238E27FC236}">
+                <a16:creationId xmlns:a16="http://schemas.microsoft.com/office/drawing/2014/main" id="{DD5EA1B7-E286-3293-4DE8-8552DEE21911}"/>
+              </a:ext>
+            </a:extLst>
+          </p:cNvPr>
+          <p:cNvSpPr txBox="1">
+            <a:spLocks/>
+          </p:cNvSpPr>
           <p:nvPr/>
-        </p:nvPicPr>
-        <p:blipFill>
-          <a:blip r:embed="rId3"/>
-          <a:stretch>
-            <a:fillRect/>
-          </a:stretch>
-        </p:blipFill>
+        </p:nvSpPr>
         <p:spPr>
           <a:xfrm>
-            <a:off x="2820098" y="4359392"/>
-            <a:ext cx="2068650" cy="1684597"/>
+            <a:off x="1741239" y="5441374"/>
+            <a:ext cx="585215" cy="329660"/>
           </a:xfrm>
           <a:prstGeom prst="rect">
             <a:avLst/>
           </a:prstGeom>
         </p:spPr>
-      </p:pic>
-      <p:sp>
-        <p:nvSpPr>
-          <p:cNvPr id="11" name="Заголовок 1">
-            <a:extLst>
-              <a:ext uri="{FF2B5EF4-FFF2-40B4-BE49-F238E27FC236}">
-                <a16:creationId xmlns:a16="http://schemas.microsoft.com/office/drawing/2014/main" id="{A48D415A-7FC9-D96C-5703-760180D352A9}"/>
-              </a:ext>
-            </a:extLst>
-          </p:cNvPr>
-          <p:cNvSpPr txBox="1">
-            <a:spLocks/>
-          </p:cNvSpPr>
-          <p:nvPr/>
-        </p:nvSpPr>
-        <p:spPr>
-          <a:xfrm>
-            <a:off x="6974377" y="5997298"/>
-            <a:ext cx="872838" cy="531632"/>
-          </a:xfrm>
-          <a:prstGeom prst="rect">
-            <a:avLst/>
-          </a:prstGeom>
-        </p:spPr>
         <p:txBody>
           <a:bodyPr vert="horz" lIns="91440" tIns="45720" rIns="91440" bIns="45720" rtlCol="0" anchor="ctr">
-            <a:normAutofit fontScale="92500"/>
+            <a:noAutofit/>
           </a:bodyPr>
           <a:lstStyle>
             <a:lvl1pPr algn="l" defTabSz="914400" rtl="0" eaLnBrk="1" latinLnBrk="0" hangingPunct="1">
@@ -6300,68 +6226,137 @@
           </a:lstStyle>
           <a:p>
             <a:r>
-              <a:rPr lang="ru-RU" sz="2400" b="1" dirty="0">
-                <a:latin typeface="+mn-lt"/>
-                <a:cs typeface="Times New Roman" panose="02020603050405020304" pitchFamily="18" charset="0"/>
-              </a:rPr>
-              <a:t>СУБД</a:t>
-            </a:r>
-          </a:p>
-        </p:txBody>
-      </p:sp>
-      <p:sp>
-        <p:nvSpPr>
-          <p:cNvPr id="12" name="Заголовок 1">
-            <a:extLst>
-              <a:ext uri="{FF2B5EF4-FFF2-40B4-BE49-F238E27FC236}">
-                <a16:creationId xmlns:a16="http://schemas.microsoft.com/office/drawing/2014/main" id="{DD5EA1B7-E286-3293-4DE8-8552DEE21911}"/>
-              </a:ext>
-            </a:extLst>
-          </p:cNvPr>
-          <p:cNvSpPr txBox="1">
-            <a:spLocks/>
-          </p:cNvSpPr>
-          <p:nvPr/>
-        </p:nvSpPr>
-        <p:spPr>
-          <a:xfrm>
-            <a:off x="3418004" y="5997298"/>
-            <a:ext cx="872838" cy="531632"/>
-          </a:xfrm>
-          <a:prstGeom prst="rect">
-            <a:avLst/>
-          </a:prstGeom>
-        </p:spPr>
-        <p:txBody>
-          <a:bodyPr vert="horz" lIns="91440" tIns="45720" rIns="91440" bIns="45720" rtlCol="0" anchor="ctr">
-            <a:normAutofit/>
-          </a:bodyPr>
-          <a:lstStyle>
-            <a:lvl1pPr algn="l" defTabSz="914400" rtl="0" eaLnBrk="1" latinLnBrk="0" hangingPunct="1">
-              <a:lnSpc>
-                <a:spcPct val="90000"/>
-              </a:lnSpc>
-              <a:spcBef>
-                <a:spcPct val="0"/>
-              </a:spcBef>
-              <a:buNone/>
-              <a:defRPr sz="4400" kern="1200">
+              <a:rPr lang="ru-RU" sz="2500" b="1" dirty="0">
                 <a:solidFill>
-                  <a:schemeClr val="tx1"/>
+                  <a:srgbClr val="052646"/>
                 </a:solidFill>
-                <a:latin typeface="+mj-lt"/>
-                <a:ea typeface="+mj-ea"/>
-                <a:cs typeface="+mj-cs"/>
-              </a:defRPr>
-            </a:lvl1pPr>
-          </a:lstStyle>
-          <a:p>
-            <a:r>
-              <a:rPr lang="ru-RU" sz="2400" b="1" dirty="0">
                 <a:latin typeface="+mn-lt"/>
                 <a:cs typeface="Times New Roman" panose="02020603050405020304" pitchFamily="18" charset="0"/>
               </a:rPr>
               <a:t>БД</a:t>
+            </a:r>
+          </a:p>
+        </p:txBody>
+      </p:sp>
+      <p:sp>
+        <p:nvSpPr>
+          <p:cNvPr id="17" name="TextBox 16">
+            <a:extLst>
+              <a:ext uri="{FF2B5EF4-FFF2-40B4-BE49-F238E27FC236}">
+                <a16:creationId xmlns:a16="http://schemas.microsoft.com/office/drawing/2014/main" id="{516B07CC-E271-C309-BFE7-DF0DCCB90A28}"/>
+              </a:ext>
+            </a:extLst>
+          </p:cNvPr>
+          <p:cNvSpPr txBox="1"/>
+          <p:nvPr/>
+        </p:nvSpPr>
+        <p:spPr>
+          <a:xfrm>
+            <a:off x="9448108" y="5313739"/>
+            <a:ext cx="676794" cy="461665"/>
+          </a:xfrm>
+          <a:prstGeom prst="rect">
+            <a:avLst/>
+          </a:prstGeom>
+          <a:noFill/>
+        </p:spPr>
+        <p:txBody>
+          <a:bodyPr wrap="square">
+            <a:spAutoFit/>
+          </a:bodyPr>
+          <a:lstStyle/>
+          <a:p>
+            <a:r>
+              <a:rPr lang="ru-RU" sz="2400" b="1" dirty="0">
+                <a:solidFill>
+                  <a:srgbClr val="052646"/>
+                </a:solidFill>
+                <a:latin typeface="+mn-lt"/>
+                <a:cs typeface="Times New Roman" panose="02020603050405020304" pitchFamily="18" charset="0"/>
+              </a:rPr>
+              <a:t>БД</a:t>
+            </a:r>
+          </a:p>
+        </p:txBody>
+      </p:sp>
+      <p:sp>
+        <p:nvSpPr>
+          <p:cNvPr id="18" name="TextBox 17">
+            <a:extLst>
+              <a:ext uri="{FF2B5EF4-FFF2-40B4-BE49-F238E27FC236}">
+                <a16:creationId xmlns:a16="http://schemas.microsoft.com/office/drawing/2014/main" id="{F9B7A1E3-AC9A-A094-A71B-B91F2248AFBC}"/>
+              </a:ext>
+            </a:extLst>
+          </p:cNvPr>
+          <p:cNvSpPr txBox="1"/>
+          <p:nvPr/>
+        </p:nvSpPr>
+        <p:spPr>
+          <a:xfrm>
+            <a:off x="5900306" y="5321646"/>
+            <a:ext cx="1115635" cy="461665"/>
+          </a:xfrm>
+          <a:prstGeom prst="rect">
+            <a:avLst/>
+          </a:prstGeom>
+          <a:noFill/>
+        </p:spPr>
+        <p:txBody>
+          <a:bodyPr wrap="square">
+            <a:spAutoFit/>
+          </a:bodyPr>
+          <a:lstStyle/>
+          <a:p>
+            <a:r>
+              <a:rPr lang="ru-RU" sz="2400" b="1" dirty="0">
+                <a:solidFill>
+                  <a:srgbClr val="052646"/>
+                </a:solidFill>
+                <a:latin typeface="+mn-lt"/>
+                <a:cs typeface="Times New Roman" panose="02020603050405020304" pitchFamily="18" charset="0"/>
+              </a:rPr>
+              <a:t>Клоны</a:t>
+            </a:r>
+          </a:p>
+        </p:txBody>
+      </p:sp>
+      <p:sp>
+        <p:nvSpPr>
+          <p:cNvPr id="19" name="TextBox 18">
+            <a:extLst>
+              <a:ext uri="{FF2B5EF4-FFF2-40B4-BE49-F238E27FC236}">
+                <a16:creationId xmlns:a16="http://schemas.microsoft.com/office/drawing/2014/main" id="{31B6B481-E017-7D65-046E-6F3B89AB320E}"/>
+              </a:ext>
+            </a:extLst>
+          </p:cNvPr>
+          <p:cNvSpPr txBox="1"/>
+          <p:nvPr/>
+        </p:nvSpPr>
+        <p:spPr>
+          <a:xfrm>
+            <a:off x="3932617" y="5309369"/>
+            <a:ext cx="1026619" cy="461665"/>
+          </a:xfrm>
+          <a:prstGeom prst="rect">
+            <a:avLst/>
+          </a:prstGeom>
+          <a:noFill/>
+        </p:spPr>
+        <p:txBody>
+          <a:bodyPr wrap="square">
+            <a:spAutoFit/>
+          </a:bodyPr>
+          <a:lstStyle/>
+          <a:p>
+            <a:r>
+              <a:rPr lang="ru-RU" sz="2400" b="1" dirty="0">
+                <a:solidFill>
+                  <a:srgbClr val="052646"/>
+                </a:solidFill>
+                <a:latin typeface="+mn-lt"/>
+                <a:cs typeface="Times New Roman" panose="02020603050405020304" pitchFamily="18" charset="0"/>
+              </a:rPr>
+              <a:t>Образ</a:t>
             </a:r>
           </a:p>
         </p:txBody>
@@ -6451,7 +6446,7 @@
         <p:spPr>
           <a:xfrm>
             <a:off x="838200" y="1325563"/>
-            <a:ext cx="10515600" cy="4539783"/>
+            <a:ext cx="10515600" cy="4751041"/>
           </a:xfrm>
         </p:spPr>
         <p:txBody>
@@ -6475,7 +6470,19 @@
               <a:rPr lang="ru-RU" sz="2400" dirty="0">
                 <a:cs typeface="Times New Roman" panose="02020603050405020304" pitchFamily="18" charset="0"/>
               </a:rPr>
-              <a:t>Разработка системы централизованного управления копиями баз данных MS SQL с возможностью создания образов и развёртывания клонов через веб-интерфейс на .NET Core и Blazor</a:t>
+              <a:t>Разработка системы централизованного управления копиями баз данных M</a:t>
+            </a:r>
+            <a:r>
+              <a:rPr lang="en-US" sz="2400" dirty="0">
+                <a:cs typeface="Times New Roman" panose="02020603050405020304" pitchFamily="18" charset="0"/>
+              </a:rPr>
+              <a:t>ircosoft</a:t>
+            </a:r>
+            <a:r>
+              <a:rPr lang="ru-RU" sz="2400" dirty="0">
+                <a:cs typeface="Times New Roman" panose="02020603050405020304" pitchFamily="18" charset="0"/>
+              </a:rPr>
+              <a:t> SQL с возможностью создания образов и развёртывания клонов через веб-интерфейс на .NET Core и Blazor</a:t>
             </a:r>
             <a:r>
               <a:rPr lang="en-US" sz="2400" dirty="0">
@@ -6501,124 +6508,44 @@
             </a:r>
           </a:p>
           <a:p>
-            <a:pPr marL="742950" lvl="1" indent="-285750">
-              <a:lnSpc>
-                <a:spcPct val="110000"/>
-              </a:lnSpc>
-              <a:tabLst>
-                <a:tab pos="630555" algn="l"/>
-              </a:tabLst>
-            </a:pPr>
-            <a:r>
-              <a:rPr lang="ru-RU" dirty="0">
-                <a:solidFill>
-                  <a:srgbClr val="000000"/>
-                </a:solidFill>
-                <a:ea typeface="Cambria" panose="02040503050406030204" pitchFamily="18" charset="0"/>
-                <a:cs typeface="Times New Roman" panose="02020603050405020304" pitchFamily="18" charset="0"/>
-              </a:rPr>
-              <a:t>Разработка ТЗ</a:t>
-            </a:r>
-          </a:p>
-          <a:p>
-            <a:pPr marL="742950" lvl="1" indent="-285750">
-              <a:lnSpc>
-                <a:spcPct val="110000"/>
-              </a:lnSpc>
-              <a:tabLst>
-                <a:tab pos="630555" algn="l"/>
-              </a:tabLst>
-            </a:pPr>
-            <a:r>
-              <a:rPr lang="ru-RU" dirty="0">
-                <a:solidFill>
-                  <a:srgbClr val="000000"/>
-                </a:solidFill>
-                <a:ea typeface="Cambria" panose="02040503050406030204" pitchFamily="18" charset="0"/>
-                <a:cs typeface="Times New Roman" panose="02020603050405020304" pitchFamily="18" charset="0"/>
-              </a:rPr>
-              <a:t>Разработка архитектуры согласно ТЗ</a:t>
-            </a:r>
-          </a:p>
-          <a:p>
-            <a:pPr marL="742950" lvl="1" indent="-285750">
-              <a:lnSpc>
-                <a:spcPct val="110000"/>
-              </a:lnSpc>
-              <a:tabLst>
-                <a:tab pos="630555" algn="l"/>
-              </a:tabLst>
-            </a:pPr>
-            <a:r>
-              <a:rPr lang="ru-RU" dirty="0">
-                <a:solidFill>
-                  <a:srgbClr val="000000"/>
-                </a:solidFill>
-                <a:ea typeface="Cambria" panose="02040503050406030204" pitchFamily="18" charset="0"/>
-                <a:cs typeface="Times New Roman" panose="02020603050405020304" pitchFamily="18" charset="0"/>
-              </a:rPr>
-              <a:t>Реализация функционала службы-агента</a:t>
-            </a:r>
-          </a:p>
-          <a:p>
-            <a:pPr marL="742950" lvl="1" indent="-285750">
-              <a:lnSpc>
-                <a:spcPct val="110000"/>
-              </a:lnSpc>
-              <a:tabLst>
-                <a:tab pos="630555" algn="l"/>
-              </a:tabLst>
-            </a:pPr>
-            <a:r>
-              <a:rPr lang="ru-RU" dirty="0">
-                <a:solidFill>
-                  <a:srgbClr val="000000"/>
-                </a:solidFill>
-                <a:ea typeface="Cambria" panose="02040503050406030204" pitchFamily="18" charset="0"/>
-                <a:cs typeface="Times New Roman" panose="02020603050405020304" pitchFamily="18" charset="0"/>
-              </a:rPr>
-              <a:t>Разработка клиентской (браузерной) части веб-приложения </a:t>
-            </a:r>
-          </a:p>
-          <a:p>
-            <a:pPr marL="742950" lvl="1" indent="-285750">
-              <a:lnSpc>
-                <a:spcPct val="110000"/>
-              </a:lnSpc>
-              <a:tabLst>
-                <a:tab pos="630555" algn="l"/>
-              </a:tabLst>
-            </a:pPr>
-            <a:r>
-              <a:rPr lang="ru-RU" dirty="0">
-                <a:solidFill>
-                  <a:srgbClr val="000000"/>
-                </a:solidFill>
-                <a:ea typeface="Cambria" panose="02040503050406030204" pitchFamily="18" charset="0"/>
-                <a:cs typeface="Times New Roman" panose="02020603050405020304" pitchFamily="18" charset="0"/>
-              </a:rPr>
-              <a:t>Разработка серверной части веб-приложения </a:t>
-            </a:r>
-          </a:p>
-          <a:p>
-            <a:pPr marL="742950" lvl="1" indent="-285750">
-              <a:lnSpc>
-                <a:spcPct val="110000"/>
-              </a:lnSpc>
-              <a:tabLst>
-                <a:tab pos="630555" algn="l"/>
-              </a:tabLst>
-            </a:pPr>
-            <a:r>
-              <a:rPr lang="ru-RU" dirty="0">
-                <a:solidFill>
-                  <a:srgbClr val="000000"/>
-                </a:solidFill>
-                <a:ea typeface="Cambria" panose="02040503050406030204" pitchFamily="18" charset="0"/>
-                <a:cs typeface="Times New Roman" panose="02020603050405020304" pitchFamily="18" charset="0"/>
-              </a:rPr>
+            <a:pPr lvl="0"/>
+            <a:r>
+              <a:rPr lang="ru-RU" sz="2400" dirty="0"/>
+              <a:t>Разработка технического задания</a:t>
+            </a:r>
+            <a:endParaRPr lang="ru-RU" sz="4400" dirty="0"/>
+          </a:p>
+          <a:p>
+            <a:pPr lvl="0"/>
+            <a:r>
+              <a:rPr lang="ru-RU" sz="2400" dirty="0"/>
+              <a:t>Реализация функционала службы-агента, которые будет работать с базой на сервере.</a:t>
+            </a:r>
+            <a:endParaRPr lang="ru-RU" sz="4400" dirty="0"/>
+          </a:p>
+          <a:p>
+            <a:pPr lvl="0"/>
+            <a:r>
+              <a:rPr lang="ru-RU" sz="2400" dirty="0"/>
+              <a:t>Разработка клиентской части веб-приложения </a:t>
+            </a:r>
+            <a:endParaRPr lang="ru-RU" sz="4400" dirty="0"/>
+          </a:p>
+          <a:p>
+            <a:pPr lvl="0"/>
+            <a:r>
+              <a:rPr lang="ru-RU" sz="2400" dirty="0"/>
+              <a:t>Разработка серверной части веб-приложения, взаимодействующей с развёрнутыми агентами на серверах и клиентской часть.</a:t>
+            </a:r>
+            <a:endParaRPr lang="ru-RU" sz="4400" dirty="0"/>
+          </a:p>
+          <a:p>
+            <a:pPr lvl="0"/>
+            <a:r>
+              <a:rPr lang="ru-RU" sz="2400" dirty="0"/>
               <a:t>Тестирование и отладка веб-приложения</a:t>
             </a:r>
+            <a:endParaRPr lang="ru-RU" sz="4400" dirty="0"/>
           </a:p>
           <a:p>
             <a:pPr marL="742950" lvl="1" indent="-285750">
@@ -6725,8 +6652,8 @@
         </p:blipFill>
         <p:spPr bwMode="auto">
           <a:xfrm>
-            <a:off x="5445314" y="2958324"/>
-            <a:ext cx="4895718" cy="3099604"/>
+            <a:off x="5660966" y="2063937"/>
+            <a:ext cx="5006097" cy="3169487"/>
           </a:xfrm>
           <a:prstGeom prst="rect">
             <a:avLst/>
@@ -6807,8 +6734,8 @@
         </p:blipFill>
         <p:spPr bwMode="auto">
           <a:xfrm>
-            <a:off x="1909845" y="2958324"/>
-            <a:ext cx="2547178" cy="2612212"/>
+            <a:off x="1850968" y="1997435"/>
+            <a:ext cx="2662155" cy="2730125"/>
           </a:xfrm>
           <a:prstGeom prst="rect">
             <a:avLst/>
@@ -6839,7 +6766,7 @@
         </p:nvSpPr>
         <p:spPr>
           <a:xfrm>
-            <a:off x="1909845" y="5570536"/>
+            <a:off x="1850968" y="4647208"/>
             <a:ext cx="3113844" cy="461665"/>
           </a:xfrm>
           <a:prstGeom prst="rect">
@@ -6896,41 +6823,6 @@
               <a:t>4</a:t>
             </a:fld>
             <a:endParaRPr lang="ru-RU"/>
-          </a:p>
-        </p:txBody>
-      </p:sp>
-      <p:sp>
-        <p:nvSpPr>
-          <p:cNvPr id="8" name="TextBox 7">
-            <a:extLst>
-              <a:ext uri="{FF2B5EF4-FFF2-40B4-BE49-F238E27FC236}">
-                <a16:creationId xmlns:a16="http://schemas.microsoft.com/office/drawing/2014/main" id="{799A861A-E253-17E2-A091-84431EC03268}"/>
-              </a:ext>
-            </a:extLst>
-          </p:cNvPr>
-          <p:cNvSpPr txBox="1"/>
-          <p:nvPr/>
-        </p:nvSpPr>
-        <p:spPr>
-          <a:xfrm>
-            <a:off x="838200" y="1187711"/>
-            <a:ext cx="10515600" cy="1200329"/>
-          </a:xfrm>
-          <a:prstGeom prst="rect">
-            <a:avLst/>
-          </a:prstGeom>
-          <a:noFill/>
-        </p:spPr>
-        <p:txBody>
-          <a:bodyPr wrap="square">
-            <a:spAutoFit/>
-          </a:bodyPr>
-          <a:lstStyle/>
-          <a:p>
-            <a:r>
-              <a:rPr lang="ru-RU" sz="2400" dirty="0"/>
-              <a:t>На рынке присутствуют аналоги разрабатываемого продукта. Однако было принято решение о собственной разработке ввиду высокой стоимости лицензий на готовые коммерческие решения.</a:t>
-            </a:r>
           </a:p>
         </p:txBody>
       </p:sp>
@@ -7410,7 +7302,7 @@
               <a:rPr lang="ru-RU" b="1" dirty="0">
                 <a:latin typeface="+mn-lt"/>
               </a:rPr>
-              <a:t>Диаграмма прецедентов</a:t>
+              <a:t>Диаграмма прецедентов </a:t>
             </a:r>
           </a:p>
         </p:txBody>
@@ -7447,10 +7339,10 @@
       </p:sp>
       <p:pic>
         <p:nvPicPr>
-          <p:cNvPr id="6" name="Рисунок 5">
-            <a:extLst>
-              <a:ext uri="{FF2B5EF4-FFF2-40B4-BE49-F238E27FC236}">
-                <a16:creationId xmlns:a16="http://schemas.microsoft.com/office/drawing/2014/main" id="{5ABEEDCD-1219-B8E0-BA41-10DC8F952C15}"/>
+          <p:cNvPr id="5" name="Рисунок 4">
+            <a:extLst>
+              <a:ext uri="{FF2B5EF4-FFF2-40B4-BE49-F238E27FC236}">
+                <a16:creationId xmlns:a16="http://schemas.microsoft.com/office/drawing/2014/main" id="{68483374-72E9-8807-2056-B6E0D6D6A5B8}"/>
               </a:ext>
             </a:extLst>
           </p:cNvPr>
@@ -7473,8 +7365,8 @@
         </p:blipFill>
         <p:spPr>
           <a:xfrm>
-            <a:off x="107343" y="1072183"/>
-            <a:ext cx="11494565" cy="5231548"/>
+            <a:off x="274321" y="1152583"/>
+            <a:ext cx="10736835" cy="5203767"/>
           </a:xfrm>
           <a:prstGeom prst="rect">
             <a:avLst/>
@@ -7672,7 +7564,9 @@
           </a:xfrm>
         </p:spPr>
         <p:txBody>
-          <a:bodyPr/>
+          <a:bodyPr>
+            <a:normAutofit/>
+          </a:bodyPr>
           <a:lstStyle/>
           <a:p>
             <a:r>
@@ -7690,12 +7584,42 @@
           </a:p>
         </p:txBody>
       </p:sp>
+      <p:sp>
+        <p:nvSpPr>
+          <p:cNvPr id="3" name="Номер слайда 2">
+            <a:extLst>
+              <a:ext uri="{FF2B5EF4-FFF2-40B4-BE49-F238E27FC236}">
+                <a16:creationId xmlns:a16="http://schemas.microsoft.com/office/drawing/2014/main" id="{F67DEC4D-1FE9-1EA8-0EC8-5107BD69B3D4}"/>
+              </a:ext>
+            </a:extLst>
+          </p:cNvPr>
+          <p:cNvSpPr>
+            <a:spLocks noGrp="1"/>
+          </p:cNvSpPr>
+          <p:nvPr>
+            <p:ph type="sldNum" sz="quarter" idx="12"/>
+          </p:nvPr>
+        </p:nvSpPr>
+        <p:spPr/>
+        <p:txBody>
+          <a:bodyPr/>
+          <a:lstStyle/>
+          <a:p>
+            <a:fld id="{C792C54E-EFF1-4B00-8652-01128ACE980F}" type="slidenum">
+              <a:rPr lang="ru-RU" smtClean="0"/>
+              <a:pPr/>
+              <a:t>8</a:t>
+            </a:fld>
+            <a:endParaRPr lang="ru-RU"/>
+          </a:p>
+        </p:txBody>
+      </p:sp>
       <p:pic>
         <p:nvPicPr>
-          <p:cNvPr id="6" name="Рисунок 5">
-            <a:extLst>
-              <a:ext uri="{FF2B5EF4-FFF2-40B4-BE49-F238E27FC236}">
-                <a16:creationId xmlns:a16="http://schemas.microsoft.com/office/drawing/2014/main" id="{5FF461BA-E3AD-7481-95A0-F812771A6BD4}"/>
+          <p:cNvPr id="5" name="Рисунок 4">
+            <a:extLst>
+              <a:ext uri="{FF2B5EF4-FFF2-40B4-BE49-F238E27FC236}">
+                <a16:creationId xmlns:a16="http://schemas.microsoft.com/office/drawing/2014/main" id="{80B294DD-26DA-F16D-6484-C07003AF0E95}"/>
               </a:ext>
             </a:extLst>
           </p:cNvPr>
@@ -7712,50 +7636,21 @@
               </a:ext>
             </a:extLst>
           </a:blip>
+          <a:srcRect b="35781"/>
           <a:stretch>
             <a:fillRect/>
           </a:stretch>
         </p:blipFill>
         <p:spPr>
           <a:xfrm>
-            <a:off x="1412763" y="1675450"/>
-            <a:ext cx="8911644" cy="4863462"/>
+            <a:off x="557788" y="1828846"/>
+            <a:ext cx="10796012" cy="4164630"/>
           </a:xfrm>
           <a:prstGeom prst="rect">
             <a:avLst/>
           </a:prstGeom>
         </p:spPr>
       </p:pic>
-      <p:sp>
-        <p:nvSpPr>
-          <p:cNvPr id="3" name="Номер слайда 2">
-            <a:extLst>
-              <a:ext uri="{FF2B5EF4-FFF2-40B4-BE49-F238E27FC236}">
-                <a16:creationId xmlns:a16="http://schemas.microsoft.com/office/drawing/2014/main" id="{F67DEC4D-1FE9-1EA8-0EC8-5107BD69B3D4}"/>
-              </a:ext>
-            </a:extLst>
-          </p:cNvPr>
-          <p:cNvSpPr>
-            <a:spLocks noGrp="1"/>
-          </p:cNvSpPr>
-          <p:nvPr>
-            <p:ph type="sldNum" sz="quarter" idx="12"/>
-          </p:nvPr>
-        </p:nvSpPr>
-        <p:spPr/>
-        <p:txBody>
-          <a:bodyPr/>
-          <a:lstStyle/>
-          <a:p>
-            <a:fld id="{C792C54E-EFF1-4B00-8652-01128ACE980F}" type="slidenum">
-              <a:rPr lang="ru-RU" smtClean="0"/>
-              <a:pPr/>
-              <a:t>8</a:t>
-            </a:fld>
-            <a:endParaRPr lang="ru-RU"/>
-          </a:p>
-        </p:txBody>
-      </p:sp>
     </p:spTree>
     <p:extLst>
       <p:ext uri="{BB962C8B-B14F-4D97-AF65-F5344CB8AC3E}">
